--- a/Thesis/pptx_5.pptx
+++ b/Thesis/pptx_5.pptx
@@ -2719,38 +2719,241 @@
           <a:lstStyle/>
           <a:p>
             <a:r>
-              <a:t>To sum up, the three answers.</a:t>
-            </a:r>
-          </a:p>
-          <a:p>
-            <a:endParaRPr/>
-          </a:p>
-          <a:p>
-            <a:r>
+              <a:rPr dirty="0"/>
+              <a:t>To sum up, </a:t>
+            </a:r>
+            <a:r>
+              <a:rPr lang="it-IT" dirty="0"/>
+              <a:t>a wind model can </a:t>
+            </a:r>
+            <a:r>
+              <a:rPr lang="it-IT" dirty="0" err="1"/>
+              <a:t>give</a:t>
+            </a:r>
+            <a:r>
+              <a:rPr lang="it-IT" dirty="0"/>
+              <a:t> a </a:t>
+            </a:r>
+            <a:r>
+              <a:rPr lang="it-IT" dirty="0" err="1"/>
+              <a:t>closed</a:t>
+            </a:r>
+            <a:r>
+              <a:rPr lang="it-IT" dirty="0"/>
+              <a:t>-form price in the </a:t>
+            </a:r>
+            <a:r>
+              <a:rPr lang="it-IT" dirty="0" err="1"/>
+              <a:t>market’s</a:t>
+            </a:r>
+            <a:r>
+              <a:rPr lang="it-IT" dirty="0"/>
+              <a:t> range, a CAWS covers the </a:t>
+            </a:r>
+            <a:r>
+              <a:rPr lang="it-IT" dirty="0" err="1"/>
+              <a:t>calm</a:t>
+            </a:r>
+            <a:r>
+              <a:rPr lang="it-IT" dirty="0"/>
+              <a:t> </a:t>
+            </a:r>
+            <a:r>
+              <a:rPr lang="it-IT" dirty="0" err="1"/>
+              <a:t>years</a:t>
+            </a:r>
+            <a:r>
+              <a:rPr lang="it-IT" dirty="0"/>
+              <a:t> </a:t>
+            </a:r>
+            <a:r>
+              <a:rPr lang="it-IT" dirty="0" err="1"/>
+              <a:t>that</a:t>
+            </a:r>
+            <a:r>
+              <a:rPr lang="it-IT" dirty="0"/>
+              <a:t> the </a:t>
+            </a:r>
+            <a:r>
+              <a:rPr lang="it-IT" dirty="0" err="1"/>
+              <a:t>variance</a:t>
+            </a:r>
+            <a:r>
+              <a:rPr lang="it-IT" dirty="0"/>
+              <a:t> swap </a:t>
+            </a:r>
+            <a:r>
+              <a:rPr lang="it-IT" dirty="0" err="1"/>
+              <a:t>cannot</a:t>
+            </a:r>
+            <a:r>
+              <a:rPr lang="it-IT" dirty="0"/>
+              <a:t> </a:t>
+            </a:r>
+            <a:r>
+              <a:rPr lang="it-IT" dirty="0" err="1"/>
+              <a:t>detect</a:t>
+            </a:r>
+            <a:r>
+              <a:rPr lang="it-IT" dirty="0"/>
+              <a:t> and </a:t>
+            </a:r>
+            <a:r>
+              <a:rPr lang="it-IT" dirty="0" err="1"/>
+              <a:t>finally</a:t>
+            </a:r>
+            <a:r>
+              <a:rPr lang="it-IT" dirty="0"/>
+              <a:t> with the </a:t>
+            </a:r>
+            <a:r>
+              <a:rPr lang="it-IT" dirty="0" err="1"/>
+              <a:t>wrong</a:t>
+            </a:r>
+            <a:r>
+              <a:rPr lang="it-IT" dirty="0"/>
+              <a:t> data the price il </a:t>
+            </a:r>
+            <a:r>
+              <a:rPr lang="it-IT" dirty="0" err="1"/>
+              <a:t>too</a:t>
+            </a:r>
+            <a:r>
+              <a:rPr lang="it-IT" dirty="0"/>
+              <a:t> low and the model </a:t>
+            </a:r>
+            <a:r>
+              <a:rPr lang="it-IT" dirty="0" err="1"/>
+              <a:t>gives</a:t>
+            </a:r>
+            <a:r>
+              <a:rPr lang="it-IT" dirty="0"/>
+              <a:t> no warning, so data </a:t>
+            </a:r>
+            <a:r>
+              <a:rPr lang="it-IT" dirty="0" err="1"/>
+              <a:t>alignment</a:t>
+            </a:r>
+            <a:r>
+              <a:rPr lang="it-IT" dirty="0"/>
+              <a:t> </a:t>
+            </a:r>
+            <a:r>
+              <a:rPr lang="it-IT" dirty="0" err="1"/>
+              <a:t>is</a:t>
+            </a:r>
+            <a:r>
+              <a:rPr lang="it-IT" dirty="0"/>
+              <a:t> </a:t>
+            </a:r>
+            <a:r>
+              <a:rPr lang="it-IT" dirty="0" err="1"/>
+              <a:t>not</a:t>
+            </a:r>
+            <a:r>
+              <a:rPr lang="it-IT" dirty="0"/>
+              <a:t> a </a:t>
+            </a:r>
+            <a:r>
+              <a:rPr lang="it-IT" dirty="0" err="1"/>
+              <a:t>detail</a:t>
+            </a:r>
+            <a:r>
+              <a:rPr lang="it-IT" dirty="0"/>
+              <a:t> to fix </a:t>
+            </a:r>
+            <a:r>
+              <a:rPr lang="it-IT" dirty="0" err="1"/>
+              <a:t>at</a:t>
+            </a:r>
+            <a:r>
+              <a:rPr lang="it-IT" dirty="0"/>
+              <a:t> the end, </a:t>
+            </a:r>
+            <a:r>
+              <a:rPr lang="it-IT" dirty="0" err="1"/>
+              <a:t>rather</a:t>
+            </a:r>
+            <a:r>
+              <a:rPr lang="it-IT" dirty="0"/>
+              <a:t> a </a:t>
+            </a:r>
+            <a:r>
+              <a:rPr lang="it-IT" dirty="0" err="1"/>
+              <a:t>precondition</a:t>
+            </a:r>
+            <a:r>
+              <a:rPr lang="it-IT" dirty="0"/>
+              <a:t> for the model to </a:t>
+            </a:r>
+            <a:r>
+              <a:rPr lang="it-IT" dirty="0" err="1"/>
+              <a:t>mean</a:t>
+            </a:r>
+            <a:r>
+              <a:rPr lang="it-IT" dirty="0"/>
+              <a:t> </a:t>
+            </a:r>
+            <a:r>
+              <a:rPr lang="it-IT" dirty="0" err="1"/>
+              <a:t>anything</a:t>
+            </a:r>
+            <a:r>
+              <a:rPr lang="it-IT" dirty="0"/>
+              <a:t>.</a:t>
+            </a:r>
+          </a:p>
+          <a:p>
+            <a:endParaRPr lang="it-IT" dirty="0"/>
+          </a:p>
+          <a:p>
+            <a:endParaRPr lang="it-IT" dirty="0"/>
+          </a:p>
+          <a:p>
+            <a:endParaRPr lang="it-IT" dirty="0"/>
+          </a:p>
+          <a:p>
+            <a:endParaRPr lang="it-IT" dirty="0"/>
+          </a:p>
+          <a:p>
+            <a:endParaRPr lang="it-IT" dirty="0"/>
+          </a:p>
+          <a:p>
+            <a:endParaRPr lang="it-IT" dirty="0"/>
+          </a:p>
+          <a:p>
+            <a:endParaRPr dirty="0"/>
+          </a:p>
+          <a:p>
+            <a:r>
+              <a:rPr dirty="0"/>
               <a:t>Price: yes. A wind model gives a closed-form price, in the market's range.</a:t>
             </a:r>
           </a:p>
           <a:p>
-            <a:endParaRPr/>
-          </a:p>
-          <a:p>
-            <a:r>
+            <a:endParaRPr dirty="0"/>
+          </a:p>
+          <a:p>
+            <a:r>
+              <a:rPr dirty="0"/>
               <a:t>Hedge: yes. CAWS covers the calm years that a variance swap cannot see.</a:t>
             </a:r>
           </a:p>
           <a:p>
-            <a:endParaRPr/>
-          </a:p>
-          <a:p>
-            <a:r>
+            <a:endParaRPr dirty="0"/>
+          </a:p>
+          <a:p>
+            <a:r>
+              <a:rPr dirty="0"/>
               <a:t>Data: this is the key message. With the wrong data, the price is 94 per cent too low, and the model gives no warning. A simple test catches it.</a:t>
             </a:r>
           </a:p>
           <a:p>
-            <a:endParaRPr/>
-          </a:p>
-          <a:p>
-            <a:r>
+            <a:endParaRPr dirty="0"/>
+          </a:p>
+          <a:p>
+            <a:r>
+              <a:rPr dirty="0"/>
               <a:t>In one sentence: data alignment is not a detail to fix at the end. It is a precondition for the model to mean anything.</a:t>
             </a:r>
           </a:p>
@@ -2821,38 +3024,43 @@
           <a:lstStyle/>
           <a:p>
             <a:r>
+              <a:rPr dirty="0"/>
               <a:t>Finally, the main limits, and what they suggest.</a:t>
             </a:r>
           </a:p>
           <a:p>
-            <a:endParaRPr/>
-          </a:p>
-          <a:p>
-            <a:r>
+            <a:endParaRPr dirty="0"/>
+          </a:p>
+          <a:p>
+            <a:r>
+              <a:rPr dirty="0"/>
               <a:t>First, θ = 0 is a benchmark assumption. With EEX option data, the next step is to estimate the risk premium.</a:t>
             </a:r>
           </a:p>
           <a:p>
-            <a:endParaRPr/>
-          </a:p>
-          <a:p>
-            <a:r>
+            <a:endParaRPr dirty="0"/>
+          </a:p>
+          <a:p>
+            <a:r>
+              <a:rPr dirty="0"/>
               <a:t>Second, one location stands in for a whole country. Fleet-wide, hourly wind data would improve the fit.</a:t>
             </a:r>
           </a:p>
           <a:p>
-            <a:endParaRPr/>
-          </a:p>
-          <a:p>
-            <a:r>
+            <a:endParaRPr dirty="0"/>
+          </a:p>
+          <a:p>
+            <a:r>
+              <a:rPr dirty="0"/>
               <a:t>Third, the samples are short, so some results are descriptive.</a:t>
             </a:r>
           </a:p>
           <a:p>
-            <a:endParaRPr/>
-          </a:p>
-          <a:p>
-            <a:r>
+            <a:endParaRPr dirty="0"/>
+          </a:p>
+          <a:p>
+            <a:r>
+              <a:rPr dirty="0"/>
               <a:t>And one practical rule: test the wind data against generation before pricing anything.</a:t>
             </a:r>
           </a:p>
@@ -4484,12 +4692,12 @@
             </a:r>
           </a:p>
           <a:p>
-            <a:endParaRPr dirty="0"/>
+            <a:endParaRPr lang="it-IT" dirty="0"/>
           </a:p>
           <a:p>
             <a:r>
               <a:rPr dirty="0"/>
-              <a:t>For a typical 100-megawatt farm, revenue is about 16 million euros a year. So the producer needs a contract written on the wind itself. That is what this thesis builds and prices.</a:t>
+              <a:t>So the producer needs a contract written on the wind itself. That is what this thesis builds and prices.</a:t>
             </a:r>
           </a:p>
         </p:txBody>
@@ -4617,8 +4825,24 @@
           </a:p>
           <a:p>
             <a:r>
+              <a:rPr lang="it-IT" dirty="0"/>
+              <a:t>The first </a:t>
+            </a:r>
+            <a:r>
+              <a:rPr lang="it-IT" dirty="0" err="1"/>
+              <a:t>is</a:t>
+            </a:r>
+            <a:r>
+              <a:rPr lang="it-IT" dirty="0"/>
+              <a:t> </a:t>
+            </a:r>
+            <a:r>
+              <a:rPr lang="it-IT" dirty="0" err="1"/>
+              <a:t>about</a:t>
+            </a:r>
+            <a:r>
               <a:rPr dirty="0"/>
-              <a:t>One: price. Can a </a:t>
+              <a:t> price. Can a </a:t>
             </a:r>
             <a:r>
               <a:rPr lang="it-IT" dirty="0" err="1"/>
@@ -4671,8 +4895,36 @@
           </a:p>
           <a:p>
             <a:r>
+              <a:rPr lang="it-IT" dirty="0"/>
+              <a:t>The second </a:t>
+            </a:r>
+            <a:r>
+              <a:rPr lang="it-IT" dirty="0" err="1"/>
+              <a:t>is</a:t>
+            </a:r>
+            <a:r>
+              <a:rPr lang="it-IT" dirty="0"/>
+              <a:t> </a:t>
+            </a:r>
+            <a:r>
+              <a:rPr lang="it-IT" dirty="0" err="1"/>
+              <a:t>about</a:t>
+            </a:r>
+            <a:r>
+              <a:rPr lang="it-IT" dirty="0"/>
+              <a:t> </a:t>
+            </a:r>
+            <a:r>
+              <a:rPr dirty="0" err="1"/>
+              <a:t>hedg</a:t>
+            </a:r>
+            <a:r>
+              <a:rPr lang="it-IT" dirty="0" err="1"/>
+              <a:t>ing</a:t>
+            </a:r>
+            <a:r>
               <a:rPr dirty="0"/>
-              <a:t>Two: hedge. </a:t>
+              <a:t>. </a:t>
             </a:r>
             <a:r>
               <a:rPr lang="it-IT" dirty="0"/>
@@ -4757,8 +5009,40 @@
           </a:p>
           <a:p>
             <a:r>
+              <a:rPr lang="it-IT" dirty="0"/>
+              <a:t>The last and </a:t>
+            </a:r>
+            <a:r>
+              <a:rPr lang="it-IT" dirty="0" err="1"/>
+              <a:t>most</a:t>
+            </a:r>
+            <a:r>
+              <a:rPr lang="it-IT" dirty="0"/>
+              <a:t> </a:t>
+            </a:r>
+            <a:r>
+              <a:rPr lang="it-IT" dirty="0" err="1"/>
+              <a:t>important</a:t>
+            </a:r>
+            <a:r>
+              <a:rPr lang="it-IT" dirty="0"/>
+              <a:t> </a:t>
+            </a:r>
+            <a:r>
+              <a:rPr lang="it-IT" dirty="0" err="1"/>
+              <a:t>is</a:t>
+            </a:r>
+            <a:r>
+              <a:rPr lang="it-IT" dirty="0"/>
+              <a:t> </a:t>
+            </a:r>
+            <a:r>
+              <a:rPr lang="it-IT" dirty="0" err="1"/>
+              <a:t>about</a:t>
+            </a:r>
+            <a:r>
               <a:rPr dirty="0"/>
-              <a:t>Three: data. </a:t>
+              <a:t> data. </a:t>
             </a:r>
             <a:r>
               <a:rPr lang="it-IT" dirty="0" err="1"/>
@@ -4872,7 +5156,19 @@
           <a:p>
             <a:r>
               <a:rPr dirty="0"/>
-              <a:t>One assumption holds throughout. θ = 0 is adopted as a benchmark assumption, in the absence of EEX option-implied data. </a:t>
+              <a:t>One assumption holds </a:t>
+            </a:r>
+            <a:r>
+              <a:rPr dirty="0" err="1"/>
+              <a:t>throughou</a:t>
+            </a:r>
+            <a:r>
+              <a:rPr lang="it-IT" dirty="0"/>
+              <a:t>:</a:t>
+            </a:r>
+            <a:r>
+              <a:rPr dirty="0"/>
+              <a:t> θ = 0 is adopted as a benchmark assumption, in the absence of EEX option-implied data. </a:t>
             </a:r>
             <a:r>
               <a:rPr lang="it-IT" dirty="0"/>
@@ -5025,15 +5321,7 @@
             </a:r>
             <a:r>
               <a:rPr lang="en-US" dirty="0"/>
-              <a:t>, the height of a turbine. This is the area that I </a:t>
-            </a:r>
-            <a:r>
-              <a:rPr lang="en-US" dirty="0" err="1"/>
-              <a:t>choosed</a:t>
-            </a:r>
-            <a:r>
-              <a:rPr lang="en-US" dirty="0"/>
-              <a:t> since </a:t>
+              <a:t>, the height of a turbine. This is the area that I chose since </a:t>
             </a:r>
             <a:r>
               <a:rPr lang="en-US" dirty="0" err="1"/>
@@ -5400,11 +5688,62 @@
             </a:r>
             <a:r>
               <a:rPr lang="it-IT" dirty="0"/>
-              <a:t> C₀. </a:t>
-            </a:r>
-          </a:p>
-          <a:p>
-            <a:endParaRPr lang="it-IT" dirty="0"/>
+              <a:t> C₀, </a:t>
+            </a:r>
+            <a:r>
+              <a:rPr lang="it-IT" dirty="0" err="1"/>
+              <a:t>which</a:t>
+            </a:r>
+            <a:r>
+              <a:rPr lang="it-IT" dirty="0"/>
+              <a:t> </a:t>
+            </a:r>
+            <a:r>
+              <a:rPr lang="it-IT" dirty="0" err="1"/>
+              <a:t>represents</a:t>
+            </a:r>
+            <a:r>
+              <a:rPr lang="it-IT" dirty="0"/>
+              <a:t> </a:t>
+            </a:r>
+            <a:r>
+              <a:rPr lang="it-IT" dirty="0" err="1"/>
+              <a:t>how</a:t>
+            </a:r>
+            <a:r>
+              <a:rPr lang="it-IT" dirty="0"/>
+              <a:t> </a:t>
+            </a:r>
+            <a:r>
+              <a:rPr lang="it-IT" dirty="0" err="1"/>
+              <a:t>variable</a:t>
+            </a:r>
+            <a:r>
+              <a:rPr lang="it-IT" dirty="0"/>
+              <a:t> wind </a:t>
+            </a:r>
+            <a:r>
+              <a:rPr lang="it-IT" dirty="0" err="1"/>
+              <a:t>is</a:t>
+            </a:r>
+            <a:r>
+              <a:rPr lang="it-IT" dirty="0"/>
+              <a:t> over a </a:t>
+            </a:r>
+            <a:r>
+              <a:rPr lang="it-IT" dirty="0" err="1"/>
+              <a:t>year</a:t>
+            </a:r>
+            <a:r>
+              <a:rPr lang="it-IT" dirty="0"/>
+              <a:t>.</a:t>
+            </a:r>
+          </a:p>
+          <a:p>
+            <a:r>
+              <a:rPr lang="it-IT" dirty="0"/>
+              <a:t> </a:t>
+            </a:r>
           </a:p>
           <a:p>
             <a:r>
@@ -5507,7 +5846,55 @@
             </a:r>
             <a:r>
               <a:rPr lang="it-IT" dirty="0"/>
-              <a:t> the pricing date, h(t₀). </a:t>
+              <a:t> the pricing date, h(t₀), </a:t>
+            </a:r>
+            <a:r>
+              <a:rPr lang="it-IT" dirty="0" err="1"/>
+              <a:t>which</a:t>
+            </a:r>
+            <a:r>
+              <a:rPr lang="it-IT" dirty="0"/>
+              <a:t> </a:t>
+            </a:r>
+            <a:r>
+              <a:rPr lang="it-IT" dirty="0" err="1"/>
+              <a:t>represent</a:t>
+            </a:r>
+            <a:r>
+              <a:rPr lang="it-IT" dirty="0"/>
+              <a:t> </a:t>
+            </a:r>
+            <a:r>
+              <a:rPr lang="it-IT" dirty="0" err="1"/>
+              <a:t>how</a:t>
+            </a:r>
+            <a:r>
+              <a:rPr lang="it-IT" dirty="0"/>
+              <a:t> </a:t>
+            </a:r>
+            <a:r>
+              <a:rPr lang="it-IT" dirty="0" err="1"/>
+              <a:t>variable</a:t>
+            </a:r>
+            <a:r>
+              <a:rPr lang="it-IT" dirty="0"/>
+              <a:t> the wind </a:t>
+            </a:r>
+            <a:r>
+              <a:rPr lang="it-IT" dirty="0" err="1"/>
+              <a:t>is</a:t>
+            </a:r>
+            <a:r>
+              <a:rPr lang="it-IT" dirty="0"/>
+              <a:t> </a:t>
+            </a:r>
+            <a:r>
+              <a:rPr lang="it-IT" dirty="0" err="1"/>
+              <a:t>today</a:t>
+            </a:r>
+            <a:r>
+              <a:rPr lang="it-IT" dirty="0"/>
+              <a:t>. </a:t>
             </a:r>
           </a:p>
           <a:p>
@@ -5717,60 +6104,12 @@
             </a:r>
           </a:p>
           <a:p>
-            <a:endParaRPr dirty="0"/>
-          </a:p>
-          <a:p>
-            <a:r>
-              <a:rPr lang="it-IT" dirty="0"/>
-              <a:t>The </a:t>
-            </a:r>
-            <a:r>
-              <a:rPr lang="it-IT" dirty="0" err="1"/>
-              <a:t>whole</a:t>
-            </a:r>
-            <a:r>
-              <a:rPr lang="it-IT" dirty="0"/>
-              <a:t> pricing </a:t>
-            </a:r>
-            <a:r>
-              <a:rPr lang="it-IT" dirty="0" err="1"/>
-              <a:t>structure</a:t>
-            </a:r>
-            <a:r>
-              <a:rPr lang="it-IT" dirty="0"/>
-              <a:t> </a:t>
-            </a:r>
-            <a:r>
-              <a:rPr lang="it-IT" dirty="0" err="1"/>
-              <a:t>therefore</a:t>
-            </a:r>
-            <a:r>
-              <a:rPr lang="it-IT" dirty="0"/>
-              <a:t> </a:t>
-            </a:r>
-            <a:r>
-              <a:rPr lang="it-IT" dirty="0" err="1"/>
-              <a:t>reduces</a:t>
-            </a:r>
-            <a:r>
-              <a:rPr lang="it-IT" dirty="0"/>
-              <a:t> to </a:t>
-            </a:r>
-            <a:r>
-              <a:rPr lang="it-IT" dirty="0" err="1"/>
-              <a:t>two</a:t>
-            </a:r>
-            <a:r>
-              <a:rPr lang="it-IT" dirty="0"/>
-              <a:t> </a:t>
-            </a:r>
-            <a:r>
-              <a:rPr lang="it-IT" dirty="0" err="1"/>
-              <a:t>numbers</a:t>
-            </a:r>
-            <a:r>
-              <a:rPr lang="it-IT" dirty="0"/>
-              <a:t>. Under a </a:t>
+            <a:endParaRPr lang="it-IT" dirty="0"/>
+          </a:p>
+          <a:p>
+            <a:r>
+              <a:rPr lang="it-IT" dirty="0"/>
+              <a:t>The fair strike K, under a </a:t>
             </a:r>
             <a:r>
               <a:rPr lang="it-IT" dirty="0" err="1"/>
@@ -5778,7 +6117,7 @@
             </a:r>
             <a:r>
               <a:rPr lang="it-IT" dirty="0"/>
-              <a:t> h, following the benchmark θ = 0, the fair strike </a:t>
+              <a:t> h, following the benchmark θ = 0, </a:t>
             </a:r>
             <a:r>
               <a:rPr lang="it-IT" dirty="0" err="1"/>
@@ -5786,39 +6125,7 @@
             </a:r>
             <a:r>
               <a:rPr lang="it-IT" dirty="0"/>
-              <a:t> h(t₀) times C₀, </a:t>
-            </a:r>
-            <a:r>
-              <a:rPr lang="it-IT" dirty="0" err="1"/>
-              <a:t>because</a:t>
-            </a:r>
-            <a:r>
-              <a:rPr lang="it-IT" dirty="0"/>
-              <a:t> the Fourier </a:t>
-            </a:r>
-            <a:r>
-              <a:rPr lang="it-IT" dirty="0" err="1"/>
-              <a:t>harmonics</a:t>
-            </a:r>
-            <a:r>
-              <a:rPr lang="it-IT" dirty="0"/>
-              <a:t> integrate to zero over a </a:t>
-            </a:r>
-            <a:r>
-              <a:rPr lang="it-IT" dirty="0" err="1"/>
-              <a:t>year</a:t>
-            </a:r>
-            <a:r>
-              <a:rPr lang="it-IT" dirty="0"/>
-              <a:t>: 0.054 for Bologna, 0.873 for </a:t>
-            </a:r>
-            <a:r>
-              <a:rPr lang="it-IT" dirty="0" err="1"/>
-              <a:t>Nordfriesland</a:t>
-            </a:r>
-            <a:r>
-              <a:rPr lang="it-IT" dirty="0"/>
-              <a:t>.</a:t>
+              <a:t> h(t₀) times C₀.</a:t>
             </a:r>
             <a:endParaRPr dirty="0"/>
           </a:p>
@@ -5907,7 +6214,27 @@
             </a:r>
             <a:r>
               <a:rPr dirty="0"/>
-              <a:t> variability of wind output, minus a fixed strike. The producer sells it: it receives a fixed amount, and pays when output is unstable.</a:t>
+              <a:t> variability of wind output, minus a fixed strike. The producer sells it: it receives a fixed amount</a:t>
+            </a:r>
+            <a:r>
+              <a:rPr lang="it-IT" dirty="0"/>
+              <a:t> in case of low </a:t>
+            </a:r>
+            <a:r>
+              <a:rPr lang="it-IT" dirty="0" err="1"/>
+              <a:t>variability</a:t>
+            </a:r>
+            <a:r>
+              <a:rPr dirty="0"/>
+              <a:t>, and pays when </a:t>
+            </a:r>
+            <a:r>
+              <a:rPr lang="it-IT" dirty="0"/>
+              <a:t>wind</a:t>
+            </a:r>
+            <a:r>
+              <a:rPr dirty="0"/>
+              <a:t> is unstable.</a:t>
             </a:r>
           </a:p>
           <a:p>
@@ -5971,7 +6298,7 @@
           <a:p>
             <a:r>
               <a:rPr dirty="0"/>
-              <a:t>So the answer to question one is yes: the model gives a closed-form price, and it lands in the right range.</a:t>
+              <a:t>So the model gives a closed-form price, and it lands in the right range.</a:t>
             </a:r>
           </a:p>
         </p:txBody>
@@ -6051,7 +6378,23 @@
           <a:p>
             <a:r>
               <a:rPr dirty="0"/>
-              <a:t>A variance swap has a blind spot. It measures how much the wind changes, not whether there is enough of it. A long calm period looks stable, so the swap does not pay.</a:t>
+              <a:t>A variance swap has a blind spot. It measures how much the wind changes, not whether there is enough of it</a:t>
+            </a:r>
+            <a:r>
+              <a:rPr lang="it-IT" dirty="0"/>
+              <a:t> for the </a:t>
+            </a:r>
+            <a:r>
+              <a:rPr lang="it-IT" dirty="0" err="1"/>
+              <a:t>actual</a:t>
+            </a:r>
+            <a:r>
+              <a:rPr lang="it-IT" dirty="0"/>
+              <a:t> production</a:t>
+            </a:r>
+            <a:r>
+              <a:rPr dirty="0"/>
+              <a:t>. A long calm period looks stable, so the swap does not pay.</a:t>
             </a:r>
           </a:p>
           <a:p>
@@ -6163,27 +6506,154 @@
               <a:rPr lang="it-IT" dirty="0" err="1"/>
               <a:t>years</a:t>
             </a:r>
+            <a:r>
+              <a:rPr lang="it-IT" dirty="0"/>
+              <a:t>.</a:t>
+            </a:r>
             <a:endParaRPr dirty="0"/>
           </a:p>
           <a:p>
+            <a:endParaRPr lang="it-IT" dirty="0"/>
+          </a:p>
+          <a:p>
+            <a:pPr marL="0" marR="0" lvl="0" indent="0" algn="l" defTabSz="914400" rtl="0" eaLnBrk="1" fontAlgn="auto" latinLnBrk="0" hangingPunct="1">
+              <a:lnSpc>
+                <a:spcPct val="100000"/>
+              </a:lnSpc>
+              <a:spcBef>
+                <a:spcPts val="0"/>
+              </a:spcBef>
+              <a:spcAft>
+                <a:spcPts val="0"/>
+              </a:spcAft>
+              <a:buClrTx/>
+              <a:buSzTx/>
+              <a:buFontTx/>
+              <a:buNone/>
+              <a:tabLst/>
+              <a:defRPr/>
+            </a:pPr>
+            <a:r>
+              <a:rPr lang="it-IT" dirty="0" err="1"/>
+              <a:t>Year</a:t>
+            </a:r>
+            <a:r>
+              <a:rPr lang="it-IT" dirty="0"/>
+              <a:t> 2021 stands out in the chart </a:t>
+            </a:r>
+            <a:r>
+              <a:rPr lang="it-IT" dirty="0" err="1"/>
+              <a:t>since</a:t>
+            </a:r>
+            <a:r>
+              <a:rPr lang="it-IT" dirty="0"/>
+              <a:t> </a:t>
+            </a:r>
+            <a:r>
+              <a:rPr lang="it-IT" dirty="0" err="1"/>
+              <a:t>is</a:t>
+            </a:r>
+            <a:r>
+              <a:rPr lang="it-IT" dirty="0"/>
+              <a:t> the </a:t>
+            </a:r>
+            <a:r>
+              <a:rPr lang="it-IT" dirty="0" err="1"/>
+              <a:t>calmest</a:t>
+            </a:r>
+            <a:r>
+              <a:rPr lang="it-IT" dirty="0"/>
+              <a:t> </a:t>
+            </a:r>
+            <a:r>
+              <a:rPr lang="it-IT" dirty="0" err="1"/>
+              <a:t>year</a:t>
+            </a:r>
+            <a:r>
+              <a:rPr lang="it-IT" dirty="0"/>
+              <a:t>,</a:t>
+            </a:r>
+            <a:r>
+              <a:rPr dirty="0"/>
+              <a:t> with wind about 5 per cent below normal. </a:t>
+            </a:r>
+            <a:r>
+              <a:rPr lang="it-IT" dirty="0" err="1"/>
+              <a:t>Since</a:t>
+            </a:r>
+            <a:r>
+              <a:rPr lang="it-IT" dirty="0"/>
+              <a:t> power </a:t>
+            </a:r>
+            <a:r>
+              <a:rPr lang="it-IT" dirty="0" err="1"/>
+              <a:t>grows</a:t>
+            </a:r>
+            <a:r>
+              <a:rPr lang="it-IT" dirty="0"/>
+              <a:t> with the cube of wind speed, a small drop in wind </a:t>
+            </a:r>
+            <a:r>
+              <a:rPr lang="it-IT" dirty="0" err="1"/>
+              <a:t>magnitude</a:t>
+            </a:r>
+            <a:r>
+              <a:rPr lang="it-IT" dirty="0"/>
+              <a:t> </a:t>
+            </a:r>
+            <a:r>
+              <a:rPr lang="it-IT" dirty="0" err="1"/>
+              <a:t>is</a:t>
+            </a:r>
+            <a:r>
+              <a:rPr lang="it-IT" dirty="0"/>
+              <a:t> a large drop in the </a:t>
+            </a:r>
+            <a:r>
+              <a:rPr lang="it-IT" dirty="0" err="1"/>
+              <a:t>actual</a:t>
+            </a:r>
+            <a:r>
+              <a:rPr lang="it-IT" dirty="0"/>
+              <a:t> production. </a:t>
+            </a:r>
+            <a:r>
+              <a:rPr lang="it-IT" dirty="0" err="1"/>
+              <a:t>Indeed</a:t>
+            </a:r>
+            <a:r>
+              <a:rPr lang="it-IT" dirty="0"/>
+              <a:t> for an illustrative</a:t>
+            </a:r>
+            <a:r>
+              <a:rPr lang="en-US" dirty="0"/>
+              <a:t> 100-megawatt farm, that deficit means roughly 14 per cent less generation: about 32,000 megawatt-hours, or some 2.3 million euros of gross revenue.</a:t>
+            </a:r>
+            <a:endParaRPr lang="it-IT" dirty="0"/>
+          </a:p>
+          <a:p>
             <a:endParaRPr dirty="0"/>
           </a:p>
           <a:p>
             <a:r>
               <a:rPr dirty="0"/>
-              <a:t>The chart shows ten years at the German site. Look at 2021, in orange: the calmest year, with wind about 5 per cent below normal. Power grows with the cube of wind speed, so a small drop in wind is a large drop in output. For a 100-megawatt farm, </a:t>
-            </a:r>
-            <a:r>
-              <a:rPr lang="it-IT" dirty="0" err="1"/>
-              <a:t>that</a:t>
-            </a:r>
-            <a:r>
-              <a:rPr lang="it-IT" dirty="0"/>
-              <a:t> deficit </a:t>
-            </a:r>
-            <a:r>
-              <a:rPr lang="it-IT" dirty="0" err="1"/>
-              <a:t>means</a:t>
+              <a:t>So </a:t>
+            </a:r>
+            <a:r>
+              <a:rPr lang="it-IT" dirty="0"/>
+              <a:t>yes, </a:t>
+            </a:r>
+            <a:r>
+              <a:rPr dirty="0"/>
+              <a:t>CAWS pays in exactly the years the producer needs it</a:t>
+            </a:r>
+            <a:r>
+              <a:rPr lang="it-IT" dirty="0"/>
+              <a:t> and covers the </a:t>
+            </a:r>
+            <a:r>
+              <a:rPr lang="it-IT" dirty="0" err="1"/>
+              <a:t>other</a:t>
             </a:r>
             <a:r>
               <a:rPr lang="it-IT" dirty="0"/>
@@ -6191,60 +6661,15 @@
             </a:r>
             <a:r>
               <a:rPr lang="it-IT" dirty="0" err="1"/>
-              <a:t>roughly</a:t>
-            </a:r>
-            <a:r>
-              <a:rPr lang="it-IT" dirty="0"/>
-              <a:t> 14 per cent </a:t>
-            </a:r>
-            <a:r>
-              <a:rPr lang="it-IT" dirty="0" err="1"/>
-              <a:t>less</a:t>
-            </a:r>
-            <a:r>
-              <a:rPr lang="it-IT" dirty="0"/>
-              <a:t> generation: </a:t>
-            </a:r>
-            <a:r>
-              <a:rPr lang="it-IT" dirty="0" err="1"/>
-              <a:t>about</a:t>
-            </a:r>
-            <a:r>
-              <a:rPr lang="it-IT" dirty="0"/>
-              <a:t> 32,000 megawatt-hours, or some 2.3 </a:t>
-            </a:r>
-            <a:r>
-              <a:rPr lang="it-IT" dirty="0" err="1"/>
-              <a:t>million</a:t>
-            </a:r>
-            <a:r>
-              <a:rPr lang="it-IT" dirty="0"/>
-              <a:t> </a:t>
-            </a:r>
-            <a:r>
-              <a:rPr lang="it-IT" dirty="0" err="1"/>
-              <a:t>euros</a:t>
-            </a:r>
-            <a:r>
-              <a:rPr lang="it-IT" dirty="0"/>
-              <a:t> of </a:t>
-            </a:r>
-            <a:r>
-              <a:rPr lang="it-IT" dirty="0" err="1"/>
-              <a:t>gross</a:t>
-            </a:r>
-            <a:r>
-              <a:rPr lang="it-IT" dirty="0"/>
-              <a:t> revenue on the illustrative farm.</a:t>
-            </a:r>
-          </a:p>
-          <a:p>
-            <a:endParaRPr dirty="0"/>
-          </a:p>
-          <a:p>
+              <a:t>leg</a:t>
+            </a:r>
+            <a:r>
+              <a:rPr lang="it-IT" dirty="0"/>
+              <a:t> of risk</a:t>
+            </a:r>
             <a:r>
               <a:rPr dirty="0"/>
-              <a:t>So the answer to question two is yes: CAWS pays in exactly the years the producer needs it.</a:t>
+              <a:t>.</a:t>
             </a:r>
           </a:p>
         </p:txBody>
@@ -6371,7 +6796,23 @@
           <a:p>
             <a:r>
               <a:rPr dirty="0"/>
-              <a:t>So height is not the reason. What is?</a:t>
+              <a:t>So height is not the reason</a:t>
+            </a:r>
+            <a:r>
+              <a:rPr lang="it-IT" dirty="0"/>
+              <a:t> for a </a:t>
+            </a:r>
+            <a:r>
+              <a:rPr lang="it-IT" dirty="0" err="1"/>
+              <a:t>lower</a:t>
+            </a:r>
+            <a:r>
+              <a:rPr lang="it-IT" dirty="0"/>
+              <a:t> price</a:t>
+            </a:r>
+            <a:r>
+              <a:rPr dirty="0"/>
+              <a:t>. What is?</a:t>
             </a:r>
           </a:p>
         </p:txBody>
@@ -6469,7 +6910,15 @@
           <a:p>
             <a:r>
               <a:rPr dirty="0"/>
-              <a:t>And here is the danger. Converted into market units, the Bologna price looks reasonable. A quick check on the level would accept it. A wrong number that looks plausible is worse than one that is obviously wrong.</a:t>
+              <a:t>And here is the </a:t>
+            </a:r>
+            <a:r>
+              <a:rPr lang="it-IT" dirty="0"/>
+              <a:t>DANGER</a:t>
+            </a:r>
+            <a:r>
+              <a:rPr dirty="0"/>
+              <a:t>. Converted into market units, the Bologna price looks reasonable. A quick check on the level would accept it. A wrong number that looks plausible is worse than one that is obviously wrong.</a:t>
             </a:r>
           </a:p>
           <a:p>

--- a/Thesis/pptx_5.pptx
+++ b/Thesis/pptx_5.pptx
@@ -2398,6 +2398,13 @@
           </p:nvPr>
         </p:nvSpPr>
         <p:spPr/>
+        <p:txBody>
+          <a:bodyPr/>
+          <a:lstStyle/>
+          <a:p>
+            <a:endParaRPr lang="it-IT"/>
+          </a:p>
+        </p:txBody>
       </p:sp>
       <p:sp>
         <p:nvSpPr>
@@ -2629,7 +2636,23 @@
             </a:r>
             <a:r>
               <a:rPr lang="it-IT" dirty="0" err="1"/>
-              <a:t>namely</a:t>
+              <a:t>that</a:t>
+            </a:r>
+            <a:r>
+              <a:rPr lang="it-IT" dirty="0"/>
+              <a:t> </a:t>
+            </a:r>
+            <a:r>
+              <a:rPr lang="it-IT" dirty="0" err="1"/>
+              <a:t>is</a:t>
+            </a:r>
+            <a:r>
+              <a:rPr lang="it-IT" dirty="0"/>
+              <a:t> to </a:t>
+            </a:r>
+            <a:r>
+              <a:rPr lang="it-IT" dirty="0" err="1"/>
+              <a:t>say</a:t>
             </a:r>
             <a:r>
               <a:rPr lang="it-IT" dirty="0"/>
@@ -2702,6 +2725,13 @@
           </p:nvPr>
         </p:nvSpPr>
         <p:spPr/>
+        <p:txBody>
+          <a:bodyPr/>
+          <a:lstStyle/>
+          <a:p>
+            <a:endParaRPr lang="it-IT"/>
+          </a:p>
+        </p:txBody>
       </p:sp>
       <p:sp>
         <p:nvSpPr>
@@ -2719,12 +2749,8 @@
           <a:lstStyle/>
           <a:p>
             <a:r>
-              <a:rPr dirty="0"/>
-              <a:t>To sum up, </a:t>
-            </a:r>
-            <a:r>
-              <a:rPr lang="it-IT" dirty="0"/>
-              <a:t>a wind model can </a:t>
+              <a:rPr lang="it-IT" dirty="0"/>
+              <a:t>To sum up: a wind model can </a:t>
             </a:r>
             <a:r>
               <a:rPr lang="it-IT" dirty="0" err="1"/>
@@ -2740,15 +2766,39 @@
             </a:r>
             <a:r>
               <a:rPr lang="it-IT" dirty="0"/>
-              <a:t>-form price in the </a:t>
-            </a:r>
-            <a:r>
-              <a:rPr lang="it-IT" dirty="0" err="1"/>
-              <a:t>market’s</a:t>
-            </a:r>
-            <a:r>
-              <a:rPr lang="it-IT" dirty="0"/>
-              <a:t> range, a CAWS covers the </a:t>
+              <a:t>-form price with the </a:t>
+            </a:r>
+            <a:r>
+              <a:rPr lang="it-IT" dirty="0" err="1"/>
+              <a:t>same</a:t>
+            </a:r>
+            <a:r>
+              <a:rPr lang="it-IT" dirty="0"/>
+              <a:t> </a:t>
+            </a:r>
+            <a:r>
+              <a:rPr lang="it-IT" dirty="0" err="1"/>
+              <a:t>order</a:t>
+            </a:r>
+            <a:r>
+              <a:rPr lang="it-IT" dirty="0"/>
+              <a:t> of </a:t>
+            </a:r>
+            <a:r>
+              <a:rPr lang="it-IT" dirty="0" err="1"/>
+              <a:t>magnitude</a:t>
+            </a:r>
+            <a:r>
+              <a:rPr lang="it-IT" dirty="0"/>
+              <a:t> </a:t>
+            </a:r>
+            <a:r>
+              <a:rPr lang="it-IT" dirty="0" err="1"/>
+              <a:t>as</a:t>
+            </a:r>
+            <a:r>
+              <a:rPr lang="it-IT" dirty="0"/>
+              <a:t> the market. A CAWS covers the </a:t>
             </a:r>
             <a:r>
               <a:rPr lang="it-IT" dirty="0" err="1"/>
@@ -2764,27 +2814,75 @@
             </a:r>
             <a:r>
               <a:rPr lang="it-IT" dirty="0"/>
+              <a:t> to </a:t>
+            </a:r>
+            <a:r>
+              <a:rPr lang="it-IT" dirty="0" err="1"/>
+              <a:t>which</a:t>
+            </a:r>
+            <a:r>
+              <a:rPr lang="it-IT" dirty="0"/>
+              <a:t> the </a:t>
+            </a:r>
+            <a:r>
+              <a:rPr lang="it-IT" dirty="0" err="1"/>
+              <a:t>variance</a:t>
+            </a:r>
+            <a:r>
+              <a:rPr lang="it-IT" dirty="0"/>
+              <a:t> swap </a:t>
+            </a:r>
+            <a:r>
+              <a:rPr lang="it-IT" dirty="0" err="1"/>
+              <a:t>is</a:t>
+            </a:r>
+            <a:r>
+              <a:rPr lang="it-IT" dirty="0"/>
+              <a:t> blind. And </a:t>
+            </a:r>
+            <a:r>
+              <a:rPr lang="it-IT" dirty="0" err="1"/>
+              <a:t>finally</a:t>
+            </a:r>
+            <a:r>
+              <a:rPr lang="it-IT" dirty="0"/>
+              <a:t>, with the </a:t>
+            </a:r>
+            <a:r>
+              <a:rPr lang="it-IT" dirty="0" err="1"/>
+              <a:t>wrong</a:t>
+            </a:r>
+            <a:r>
+              <a:rPr lang="it-IT" dirty="0"/>
+              <a:t> data the price </a:t>
+            </a:r>
+            <a:r>
+              <a:rPr lang="it-IT" dirty="0" err="1"/>
+              <a:t>is</a:t>
+            </a:r>
+            <a:r>
+              <a:rPr lang="it-IT" dirty="0"/>
               <a:t> </a:t>
             </a:r>
             <a:r>
               <a:rPr lang="it-IT" dirty="0" err="1"/>
-              <a:t>that</a:t>
-            </a:r>
-            <a:r>
-              <a:rPr lang="it-IT" dirty="0"/>
-              <a:t> the </a:t>
-            </a:r>
-            <a:r>
-              <a:rPr lang="it-IT" dirty="0" err="1"/>
-              <a:t>variance</a:t>
-            </a:r>
-            <a:r>
-              <a:rPr lang="it-IT" dirty="0"/>
-              <a:t> swap </a:t>
-            </a:r>
-            <a:r>
-              <a:rPr lang="it-IT" dirty="0" err="1"/>
-              <a:t>cannot</a:t>
+              <a:t>too</a:t>
+            </a:r>
+            <a:r>
+              <a:rPr lang="it-IT" dirty="0"/>
+              <a:t> low and the model </a:t>
+            </a:r>
+            <a:r>
+              <a:rPr lang="it-IT" dirty="0" err="1"/>
+              <a:t>gives</a:t>
+            </a:r>
+            <a:r>
+              <a:rPr lang="it-IT" dirty="0"/>
+              <a:t> no warning. So data </a:t>
+            </a:r>
+            <a:r>
+              <a:rPr lang="it-IT" dirty="0" err="1"/>
+              <a:t>alignment</a:t>
             </a:r>
             <a:r>
               <a:rPr lang="it-IT" dirty="0"/>
@@ -2792,47 +2890,7 @@
             </a:r>
             <a:r>
               <a:rPr lang="it-IT" dirty="0" err="1"/>
-              <a:t>detect</a:t>
-            </a:r>
-            <a:r>
-              <a:rPr lang="it-IT" dirty="0"/>
-              <a:t> and </a:t>
-            </a:r>
-            <a:r>
-              <a:rPr lang="it-IT" dirty="0" err="1"/>
-              <a:t>finally</a:t>
-            </a:r>
-            <a:r>
-              <a:rPr lang="it-IT" dirty="0"/>
-              <a:t> with the </a:t>
-            </a:r>
-            <a:r>
-              <a:rPr lang="it-IT" dirty="0" err="1"/>
-              <a:t>wrong</a:t>
-            </a:r>
-            <a:r>
-              <a:rPr lang="it-IT" dirty="0"/>
-              <a:t> data the price il </a:t>
-            </a:r>
-            <a:r>
-              <a:rPr lang="it-IT" dirty="0" err="1"/>
-              <a:t>too</a:t>
-            </a:r>
-            <a:r>
-              <a:rPr lang="it-IT" dirty="0"/>
-              <a:t> low and the model </a:t>
-            </a:r>
-            <a:r>
-              <a:rPr lang="it-IT" dirty="0" err="1"/>
-              <a:t>gives</a:t>
-            </a:r>
-            <a:r>
-              <a:rPr lang="it-IT" dirty="0"/>
-              <a:t> no warning, so data </a:t>
-            </a:r>
-            <a:r>
-              <a:rPr lang="it-IT" dirty="0" err="1"/>
-              <a:t>alignment</a:t>
+              <a:t>is</a:t>
             </a:r>
             <a:r>
               <a:rPr lang="it-IT" dirty="0"/>
@@ -2840,7 +2898,47 @@
             </a:r>
             <a:r>
               <a:rPr lang="it-IT" dirty="0" err="1"/>
-              <a:t>is</a:t>
+              <a:t>not</a:t>
+            </a:r>
+            <a:r>
+              <a:rPr lang="it-IT" dirty="0"/>
+              <a:t> a </a:t>
+            </a:r>
+            <a:r>
+              <a:rPr lang="it-IT" dirty="0" err="1"/>
+              <a:t>detail</a:t>
+            </a:r>
+            <a:r>
+              <a:rPr lang="it-IT" dirty="0"/>
+              <a:t> to fix </a:t>
+            </a:r>
+            <a:r>
+              <a:rPr lang="it-IT" dirty="0" err="1"/>
+              <a:t>at</a:t>
+            </a:r>
+            <a:r>
+              <a:rPr lang="it-IT" dirty="0"/>
+              <a:t> the end, </a:t>
+            </a:r>
+            <a:r>
+              <a:rPr lang="it-IT" dirty="0" err="1"/>
+              <a:t>rather</a:t>
+            </a:r>
+            <a:r>
+              <a:rPr lang="it-IT" dirty="0"/>
+              <a:t> a </a:t>
+            </a:r>
+            <a:r>
+              <a:rPr lang="it-IT" dirty="0" err="1"/>
+              <a:t>precondition</a:t>
+            </a:r>
+            <a:r>
+              <a:rPr lang="it-IT" dirty="0"/>
+              <a:t> for the model to </a:t>
+            </a:r>
+            <a:r>
+              <a:rPr lang="it-IT" dirty="0" err="1"/>
+              <a:t>mean</a:t>
             </a:r>
             <a:r>
               <a:rPr lang="it-IT" dirty="0"/>
@@ -2848,114 +2946,13 @@
             </a:r>
             <a:r>
               <a:rPr lang="it-IT" dirty="0" err="1"/>
-              <a:t>not</a:t>
-            </a:r>
-            <a:r>
-              <a:rPr lang="it-IT" dirty="0"/>
-              <a:t> a </a:t>
-            </a:r>
-            <a:r>
-              <a:rPr lang="it-IT" dirty="0" err="1"/>
-              <a:t>detail</a:t>
-            </a:r>
-            <a:r>
-              <a:rPr lang="it-IT" dirty="0"/>
-              <a:t> to fix </a:t>
-            </a:r>
-            <a:r>
-              <a:rPr lang="it-IT" dirty="0" err="1"/>
-              <a:t>at</a:t>
-            </a:r>
-            <a:r>
-              <a:rPr lang="it-IT" dirty="0"/>
-              <a:t> the end, </a:t>
-            </a:r>
-            <a:r>
-              <a:rPr lang="it-IT" dirty="0" err="1"/>
-              <a:t>rather</a:t>
-            </a:r>
-            <a:r>
-              <a:rPr lang="it-IT" dirty="0"/>
-              <a:t> a </a:t>
-            </a:r>
-            <a:r>
-              <a:rPr lang="it-IT" dirty="0" err="1"/>
-              <a:t>precondition</a:t>
-            </a:r>
-            <a:r>
-              <a:rPr lang="it-IT" dirty="0"/>
-              <a:t> for the model to </a:t>
-            </a:r>
-            <a:r>
-              <a:rPr lang="it-IT" dirty="0" err="1"/>
-              <a:t>mean</a:t>
-            </a:r>
-            <a:r>
-              <a:rPr lang="it-IT" dirty="0"/>
-              <a:t> </a:t>
-            </a:r>
-            <a:r>
-              <a:rPr lang="it-IT" dirty="0" err="1"/>
               <a:t>anything</a:t>
             </a:r>
             <a:r>
               <a:rPr lang="it-IT" dirty="0"/>
               <a:t>.</a:t>
             </a:r>
-          </a:p>
-          <a:p>
-            <a:endParaRPr lang="it-IT" dirty="0"/>
-          </a:p>
-          <a:p>
-            <a:endParaRPr lang="it-IT" dirty="0"/>
-          </a:p>
-          <a:p>
-            <a:endParaRPr lang="it-IT" dirty="0"/>
-          </a:p>
-          <a:p>
-            <a:endParaRPr lang="it-IT" dirty="0"/>
-          </a:p>
-          <a:p>
-            <a:endParaRPr lang="it-IT" dirty="0"/>
-          </a:p>
-          <a:p>
-            <a:endParaRPr lang="it-IT" dirty="0"/>
-          </a:p>
-          <a:p>
             <a:endParaRPr dirty="0"/>
-          </a:p>
-          <a:p>
-            <a:r>
-              <a:rPr dirty="0"/>
-              <a:t>Price: yes. A wind model gives a closed-form price, in the market's range.</a:t>
-            </a:r>
-          </a:p>
-          <a:p>
-            <a:endParaRPr dirty="0"/>
-          </a:p>
-          <a:p>
-            <a:r>
-              <a:rPr dirty="0"/>
-              <a:t>Hedge: yes. CAWS covers the calm years that a variance swap cannot see.</a:t>
-            </a:r>
-          </a:p>
-          <a:p>
-            <a:endParaRPr dirty="0"/>
-          </a:p>
-          <a:p>
-            <a:r>
-              <a:rPr dirty="0"/>
-              <a:t>Data: this is the key message. With the wrong data, the price is 94 per cent too low, and the model gives no warning. A simple test catches it.</a:t>
-            </a:r>
-          </a:p>
-          <a:p>
-            <a:endParaRPr dirty="0"/>
-          </a:p>
-          <a:p>
-            <a:r>
-              <a:rPr dirty="0"/>
-              <a:t>In one sentence: data alignment is not a detail to fix at the end. It is a precondition for the model to mean anything.</a:t>
-            </a:r>
           </a:p>
         </p:txBody>
       </p:sp>
@@ -2970,6 +2967,13 @@
           </p:nvPr>
         </p:nvSpPr>
         <p:spPr/>
+        <p:txBody>
+          <a:bodyPr/>
+          <a:lstStyle/>
+          <a:p>
+            <a:endParaRPr lang="it-IT"/>
+          </a:p>
+        </p:txBody>
       </p:sp>
     </p:spTree>
   </p:cSld>
@@ -3007,6 +3011,13 @@
           </p:nvPr>
         </p:nvSpPr>
         <p:spPr/>
+        <p:txBody>
+          <a:bodyPr/>
+          <a:lstStyle/>
+          <a:p>
+            <a:endParaRPr lang="it-IT"/>
+          </a:p>
+        </p:txBody>
       </p:sp>
       <p:sp>
         <p:nvSpPr>
@@ -3038,12 +3049,129 @@
             </a:r>
           </a:p>
           <a:p>
+            <a:endParaRPr lang="it-IT" dirty="0"/>
+          </a:p>
+          <a:p>
+            <a:r>
+              <a:rPr lang="it-IT" dirty="0"/>
+              <a:t>Second, the </a:t>
+            </a:r>
+            <a:r>
+              <a:rPr lang="it-IT" dirty="0" err="1"/>
+              <a:t>two</a:t>
+            </a:r>
+            <a:r>
+              <a:rPr lang="it-IT" dirty="0"/>
+              <a:t> datasets </a:t>
+            </a:r>
+            <a:r>
+              <a:rPr lang="it-IT" dirty="0" err="1"/>
+              <a:t>sit</a:t>
+            </a:r>
+            <a:r>
+              <a:rPr lang="it-IT" dirty="0"/>
+              <a:t> on </a:t>
+            </a:r>
+            <a:r>
+              <a:rPr lang="it-IT" dirty="0" err="1"/>
+              <a:t>different</a:t>
+            </a:r>
+            <a:r>
+              <a:rPr lang="it-IT" dirty="0"/>
+              <a:t> Box–Cox </a:t>
+            </a:r>
+            <a:r>
+              <a:rPr lang="it-IT" dirty="0" err="1"/>
+              <a:t>scales</a:t>
+            </a:r>
+            <a:r>
+              <a:rPr lang="it-IT" dirty="0"/>
+              <a:t> and </a:t>
+            </a:r>
+            <a:r>
+              <a:rPr lang="it-IT" dirty="0" err="1"/>
+              <a:t>different</a:t>
+            </a:r>
+            <a:r>
+              <a:rPr lang="it-IT" dirty="0"/>
+              <a:t> pricing </a:t>
+            </a:r>
+            <a:r>
+              <a:rPr lang="it-IT" dirty="0" err="1"/>
+              <a:t>dates</a:t>
+            </a:r>
+            <a:r>
+              <a:rPr lang="it-IT" dirty="0"/>
+              <a:t>, so the </a:t>
+            </a:r>
+            <a:r>
+              <a:rPr lang="it-IT" dirty="0" err="1"/>
+              <a:t>comparison</a:t>
+            </a:r>
+            <a:r>
+              <a:rPr lang="it-IT" dirty="0"/>
+              <a:t> </a:t>
+            </a:r>
+            <a:r>
+              <a:rPr lang="it-IT" dirty="0" err="1"/>
+              <a:t>between</a:t>
+            </a:r>
+            <a:r>
+              <a:rPr lang="it-IT" dirty="0"/>
+              <a:t> the </a:t>
+            </a:r>
+            <a:r>
+              <a:rPr lang="it-IT" dirty="0" err="1"/>
+              <a:t>two</a:t>
+            </a:r>
+            <a:r>
+              <a:rPr lang="it-IT" dirty="0"/>
+              <a:t> </a:t>
+            </a:r>
+            <a:r>
+              <a:rPr lang="it-IT" dirty="0" err="1"/>
+              <a:t>sites</a:t>
+            </a:r>
+            <a:r>
+              <a:rPr lang="it-IT" dirty="0"/>
+              <a:t> </a:t>
+            </a:r>
+            <a:r>
+              <a:rPr lang="it-IT" dirty="0" err="1"/>
+              <a:t>is</a:t>
+            </a:r>
+            <a:r>
+              <a:rPr lang="it-IT" dirty="0"/>
+              <a:t> indicative, </a:t>
+            </a:r>
+            <a:r>
+              <a:rPr lang="it-IT" dirty="0" err="1"/>
+              <a:t>not</a:t>
+            </a:r>
+            <a:r>
+              <a:rPr lang="it-IT" dirty="0"/>
+              <a:t> </a:t>
+            </a:r>
+            <a:r>
+              <a:rPr lang="it-IT" dirty="0" err="1"/>
+              <a:t>exact</a:t>
+            </a:r>
+            <a:r>
+              <a:rPr lang="it-IT" dirty="0"/>
+              <a:t>.</a:t>
+            </a:r>
+          </a:p>
+          <a:p>
             <a:endParaRPr dirty="0"/>
           </a:p>
           <a:p>
             <a:r>
+              <a:rPr lang="it-IT" dirty="0"/>
+              <a:t>Third</a:t>
+            </a:r>
+            <a:r>
               <a:rPr dirty="0"/>
-              <a:t>Second, one location stands in for a whole country. Fleet-wide, hourly wind data would improve the fit.</a:t>
+              <a:t>, one location stands in for a whole country. Fleet-wide, hourly wind data would improve the fit.</a:t>
             </a:r>
           </a:p>
           <a:p>
@@ -3051,18 +3179,19 @@
           </a:p>
           <a:p>
             <a:r>
+              <a:rPr lang="it-IT" dirty="0" err="1"/>
+              <a:t>Fourth</a:t>
+            </a:r>
+            <a:r>
               <a:rPr dirty="0"/>
-              <a:t>Third, the samples are short, so some results are descriptive.</a:t>
+              <a:t>, the samples are short, so some results are descriptive.</a:t>
             </a:r>
           </a:p>
           <a:p>
             <a:endParaRPr dirty="0"/>
           </a:p>
           <a:p>
-            <a:r>
-              <a:rPr dirty="0"/>
-              <a:t>And one practical rule: test the wind data against generation before pricing anything.</a:t>
-            </a:r>
+            <a:endParaRPr dirty="0"/>
           </a:p>
         </p:txBody>
       </p:sp>
@@ -3130,6 +3259,13 @@
           </p:nvPr>
         </p:nvSpPr>
         <p:spPr/>
+        <p:txBody>
+          <a:bodyPr/>
+          <a:lstStyle/>
+          <a:p>
+            <a:endParaRPr lang="it-IT"/>
+          </a:p>
+        </p:txBody>
       </p:sp>
       <p:sp>
         <p:nvSpPr>
@@ -3146,10 +3282,7 @@
           <a:bodyPr/>
           <a:lstStyle/>
           <a:p>
-            <a:r>
-              <a:rPr dirty="0"/>
-              <a:t>Thank you for your attention. I am happy to take your questions.</a:t>
-            </a:r>
+            <a:endParaRPr dirty="0"/>
           </a:p>
         </p:txBody>
       </p:sp>
@@ -3217,6 +3350,13 @@
           </p:nvPr>
         </p:nvSpPr>
         <p:spPr/>
+        <p:txBody>
+          <a:bodyPr/>
+          <a:lstStyle/>
+          <a:p>
+            <a:endParaRPr lang="it-IT"/>
+          </a:p>
+        </p:txBody>
       </p:sp>
       <p:sp>
         <p:nvSpPr>
@@ -3304,6 +3444,13 @@
           </p:nvPr>
         </p:nvSpPr>
         <p:spPr/>
+        <p:txBody>
+          <a:bodyPr/>
+          <a:lstStyle/>
+          <a:p>
+            <a:endParaRPr lang="it-IT"/>
+          </a:p>
+        </p:txBody>
       </p:sp>
       <p:sp>
         <p:nvSpPr>
@@ -3390,6 +3537,13 @@
           </p:nvPr>
         </p:nvSpPr>
         <p:spPr/>
+        <p:txBody>
+          <a:bodyPr/>
+          <a:lstStyle/>
+          <a:p>
+            <a:endParaRPr lang="it-IT"/>
+          </a:p>
+        </p:txBody>
       </p:sp>
       <p:sp>
         <p:nvSpPr>
@@ -3423,6 +3577,13 @@
           </p:nvPr>
         </p:nvSpPr>
         <p:spPr/>
+        <p:txBody>
+          <a:bodyPr/>
+          <a:lstStyle/>
+          <a:p>
+            <a:endParaRPr lang="it-IT"/>
+          </a:p>
+        </p:txBody>
       </p:sp>
     </p:spTree>
   </p:cSld>
@@ -3460,6 +3621,13 @@
           </p:nvPr>
         </p:nvSpPr>
         <p:spPr/>
+        <p:txBody>
+          <a:bodyPr/>
+          <a:lstStyle/>
+          <a:p>
+            <a:endParaRPr lang="it-IT"/>
+          </a:p>
+        </p:txBody>
       </p:sp>
       <p:sp>
         <p:nvSpPr>
@@ -4046,6 +4214,13 @@
           </p:nvPr>
         </p:nvSpPr>
         <p:spPr/>
+        <p:txBody>
+          <a:bodyPr/>
+          <a:lstStyle/>
+          <a:p>
+            <a:endParaRPr lang="it-IT"/>
+          </a:p>
+        </p:txBody>
       </p:sp>
     </p:spTree>
   </p:cSld>
@@ -4083,6 +4258,13 @@
           </p:nvPr>
         </p:nvSpPr>
         <p:spPr/>
+        <p:txBody>
+          <a:bodyPr/>
+          <a:lstStyle/>
+          <a:p>
+            <a:endParaRPr lang="it-IT"/>
+          </a:p>
+        </p:txBody>
       </p:sp>
       <p:sp>
         <p:nvSpPr>
@@ -4116,6 +4298,13 @@
           </p:nvPr>
         </p:nvSpPr>
         <p:spPr/>
+        <p:txBody>
+          <a:bodyPr/>
+          <a:lstStyle/>
+          <a:p>
+            <a:endParaRPr lang="it-IT"/>
+          </a:p>
+        </p:txBody>
       </p:sp>
     </p:spTree>
   </p:cSld>
@@ -4153,6 +4342,13 @@
           </p:nvPr>
         </p:nvSpPr>
         <p:spPr/>
+        <p:txBody>
+          <a:bodyPr/>
+          <a:lstStyle/>
+          <a:p>
+            <a:endParaRPr lang="it-IT"/>
+          </a:p>
+        </p:txBody>
       </p:sp>
       <p:sp>
         <p:nvSpPr>
@@ -4434,13 +4630,101 @@
               <a:tabLst/>
               <a:defRPr/>
             </a:pPr>
+            <a:endParaRPr lang="it-IT" dirty="0"/>
+          </a:p>
+          <a:p>
+            <a:pPr marL="0" marR="0" lvl="0" indent="0" algn="l" defTabSz="914400" rtl="0" eaLnBrk="1" fontAlgn="auto" latinLnBrk="0" hangingPunct="1">
+              <a:lnSpc>
+                <a:spcPct val="100000"/>
+              </a:lnSpc>
+              <a:spcBef>
+                <a:spcPts val="0"/>
+              </a:spcBef>
+              <a:spcAft>
+                <a:spcPts val="0"/>
+              </a:spcAft>
+              <a:buClrTx/>
+              <a:buSzTx/>
+              <a:buFontTx/>
+              <a:buNone/>
+              <a:tabLst/>
+              <a:defRPr/>
+            </a:pPr>
+            <a:r>
+              <a:rPr lang="it-IT" dirty="0"/>
+              <a:t>Output and price </a:t>
+            </a:r>
+            <a:r>
+              <a:rPr lang="it-IT" dirty="0" err="1"/>
+              <a:t>therefore</a:t>
+            </a:r>
+            <a:r>
+              <a:rPr lang="it-IT" dirty="0"/>
+              <a:t> </a:t>
+            </a:r>
+            <a:r>
+              <a:rPr lang="it-IT" dirty="0" err="1"/>
+              <a:t>move</a:t>
+            </a:r>
+            <a:r>
+              <a:rPr lang="it-IT" dirty="0"/>
+              <a:t> in opposite </a:t>
+            </a:r>
+            <a:r>
+              <a:rPr lang="it-IT" dirty="0" err="1"/>
+              <a:t>directions</a:t>
+            </a:r>
+            <a:r>
+              <a:rPr lang="it-IT" dirty="0"/>
+              <a:t>. </a:t>
+            </a:r>
             <a:r>
               <a:rPr lang="it-IT" dirty="0" err="1"/>
               <a:t>This</a:t>
             </a:r>
             <a:r>
               <a:rPr lang="it-IT" dirty="0"/>
-              <a:t> negative </a:t>
+              <a:t> </a:t>
+            </a:r>
+            <a:r>
+              <a:rPr lang="it-IT" dirty="0" err="1"/>
+              <a:t>partly</a:t>
+            </a:r>
+            <a:r>
+              <a:rPr lang="it-IT" dirty="0"/>
+              <a:t> </a:t>
+            </a:r>
+            <a:r>
+              <a:rPr lang="it-IT" dirty="0" err="1"/>
+              <a:t>protects</a:t>
+            </a:r>
+            <a:r>
+              <a:rPr lang="it-IT" dirty="0"/>
+              <a:t> revenue, </a:t>
+            </a:r>
+            <a:r>
+              <a:rPr lang="it-IT" dirty="0" err="1"/>
+              <a:t>but</a:t>
+            </a:r>
+            <a:r>
+              <a:rPr lang="it-IT" dirty="0"/>
+              <a:t> </a:t>
+            </a:r>
+            <a:r>
+              <a:rPr lang="it-IT" dirty="0" err="1"/>
+              <a:t>only</a:t>
+            </a:r>
+            <a:r>
+              <a:rPr lang="it-IT" dirty="0"/>
+              <a:t> a </a:t>
+            </a:r>
+            <a:r>
+              <a:rPr lang="it-IT" dirty="0" err="1"/>
+              <a:t>little</a:t>
+            </a:r>
+            <a:r>
+              <a:rPr lang="it-IT" dirty="0"/>
+              <a:t>: the </a:t>
             </a:r>
             <a:r>
               <a:rPr lang="it-IT" dirty="0" err="1"/>
@@ -4452,19 +4736,59 @@
             </a:r>
             <a:r>
               <a:rPr lang="it-IT" dirty="0" err="1"/>
-              <a:t>dampens</a:t>
-            </a:r>
-            <a:r>
-              <a:rPr lang="it-IT" dirty="0"/>
-              <a:t> revenue </a:t>
-            </a:r>
-            <a:r>
-              <a:rPr lang="it-IT" dirty="0" err="1"/>
-              <a:t>variance</a:t>
-            </a:r>
-            <a:r>
-              <a:rPr lang="it-IT" dirty="0"/>
-              <a:t>, </a:t>
+              <a:t>is</a:t>
+            </a:r>
+            <a:r>
+              <a:rPr lang="it-IT" dirty="0"/>
+              <a:t> just </a:t>
+            </a:r>
+            <a:r>
+              <a:rPr lang="it-IT" dirty="0" err="1"/>
+              <a:t>minus</a:t>
+            </a:r>
+            <a:r>
+              <a:rPr lang="it-IT" dirty="0"/>
+              <a:t> 0.16. </a:t>
+            </a:r>
+            <a:r>
+              <a:rPr lang="it-IT" dirty="0" err="1"/>
+              <a:t>It</a:t>
+            </a:r>
+            <a:r>
+              <a:rPr lang="it-IT" dirty="0"/>
+              <a:t> </a:t>
+            </a:r>
+            <a:r>
+              <a:rPr lang="it-IT" dirty="0" err="1"/>
+              <a:t>lowers</a:t>
+            </a:r>
+            <a:r>
+              <a:rPr lang="it-IT" dirty="0"/>
+              <a:t> prices </a:t>
+            </a:r>
+            <a:r>
+              <a:rPr lang="it-IT" dirty="0" err="1"/>
+              <a:t>when</a:t>
+            </a:r>
+            <a:r>
+              <a:rPr lang="it-IT" dirty="0"/>
+              <a:t> the producer </a:t>
+            </a:r>
+            <a:r>
+              <a:rPr lang="it-IT" dirty="0" err="1"/>
+              <a:t>has</a:t>
+            </a:r>
+            <a:r>
+              <a:rPr lang="it-IT" dirty="0"/>
+              <a:t> a </a:t>
+            </a:r>
+            <a:r>
+              <a:rPr lang="it-IT" dirty="0" err="1"/>
+              <a:t>lot</a:t>
+            </a:r>
+            <a:r>
+              <a:rPr lang="it-IT" dirty="0"/>
+              <a:t> to sell, </a:t>
             </a:r>
             <a:r>
               <a:rPr lang="it-IT" dirty="0" err="1"/>
@@ -4484,6 +4808,54 @@
             </a:r>
             <a:r>
               <a:rPr lang="it-IT" dirty="0" err="1"/>
+              <a:t>does</a:t>
+            </a:r>
+            <a:r>
+              <a:rPr lang="it-IT" dirty="0"/>
+              <a:t> </a:t>
+            </a:r>
+            <a:r>
+              <a:rPr lang="it-IT" dirty="0" err="1"/>
+              <a:t>not</a:t>
+            </a:r>
+            <a:r>
+              <a:rPr lang="it-IT" dirty="0"/>
+              <a:t> </a:t>
+            </a:r>
+            <a:r>
+              <a:rPr lang="it-IT" dirty="0" err="1"/>
+              <a:t>raise</a:t>
+            </a:r>
+            <a:r>
+              <a:rPr lang="it-IT" dirty="0"/>
+              <a:t> </a:t>
+            </a:r>
+            <a:r>
+              <a:rPr lang="it-IT" dirty="0" err="1"/>
+              <a:t>them</a:t>
+            </a:r>
+            <a:r>
+              <a:rPr lang="it-IT" dirty="0"/>
+              <a:t> </a:t>
+            </a:r>
+            <a:r>
+              <a:rPr lang="it-IT" dirty="0" err="1"/>
+              <a:t>enough</a:t>
+            </a:r>
+            <a:r>
+              <a:rPr lang="it-IT" dirty="0"/>
+              <a:t> </a:t>
+            </a:r>
+            <a:r>
+              <a:rPr lang="it-IT" dirty="0" err="1"/>
+              <a:t>when</a:t>
+            </a:r>
+            <a:r>
+              <a:rPr lang="it-IT" dirty="0"/>
+              <a:t> the wind </a:t>
+            </a:r>
+            <a:r>
+              <a:rPr lang="it-IT" dirty="0" err="1"/>
               <a:t>is</a:t>
             </a:r>
             <a:r>
@@ -4492,155 +4864,90 @@
             </a:r>
             <a:r>
               <a:rPr lang="it-IT" dirty="0" err="1"/>
-              <a:t>weak</a:t>
-            </a:r>
-            <a:r>
-              <a:rPr lang="it-IT" dirty="0"/>
-              <a:t>, </a:t>
-            </a:r>
-            <a:r>
-              <a:rPr lang="it-IT" dirty="0" err="1"/>
-              <a:t>minus</a:t>
-            </a:r>
-            <a:r>
-              <a:rPr lang="it-IT" dirty="0"/>
-              <a:t> 0.16 over 2015 to 2024, and </a:t>
-            </a:r>
-            <a:r>
-              <a:rPr lang="it-IT" dirty="0" err="1"/>
-              <a:t>asymmetric</a:t>
-            </a:r>
-            <a:r>
-              <a:rPr lang="it-IT" dirty="0"/>
-              <a:t>: </a:t>
-            </a:r>
-            <a:r>
-              <a:rPr lang="it-IT" dirty="0" err="1"/>
-              <a:t>it</a:t>
+              <a:t>missing</a:t>
+            </a:r>
+            <a:r>
+              <a:rPr lang="it-IT" dirty="0"/>
+              <a:t>.</a:t>
+            </a:r>
+          </a:p>
+          <a:p>
+            <a:pPr marL="0" marR="0" lvl="0" indent="0" algn="l" defTabSz="914400" rtl="0" eaLnBrk="1" fontAlgn="auto" latinLnBrk="0" hangingPunct="1">
+              <a:lnSpc>
+                <a:spcPct val="100000"/>
+              </a:lnSpc>
+              <a:spcBef>
+                <a:spcPts val="0"/>
+              </a:spcBef>
+              <a:spcAft>
+                <a:spcPts val="0"/>
+              </a:spcAft>
+              <a:buClrTx/>
+              <a:buSzTx/>
+              <a:buFontTx/>
+              <a:buNone/>
+              <a:tabLst/>
+              <a:defRPr/>
+            </a:pPr>
+            <a:endParaRPr lang="it-IT" dirty="0"/>
+          </a:p>
+          <a:p>
+            <a:pPr marL="0" marR="0" lvl="0" indent="0" algn="l" defTabSz="914400" rtl="0" eaLnBrk="1" fontAlgn="auto" latinLnBrk="0" hangingPunct="1">
+              <a:lnSpc>
+                <a:spcPct val="100000"/>
+              </a:lnSpc>
+              <a:spcBef>
+                <a:spcPts val="0"/>
+              </a:spcBef>
+              <a:spcAft>
+                <a:spcPts val="0"/>
+              </a:spcAft>
+              <a:buClrTx/>
+              <a:buSzTx/>
+              <a:buFontTx/>
+              <a:buNone/>
+              <a:tabLst/>
+              <a:defRPr/>
+            </a:pPr>
+            <a:r>
+              <a:rPr lang="it-IT" dirty="0" err="1"/>
+              <a:t>As</a:t>
+            </a:r>
+            <a:r>
+              <a:rPr lang="it-IT" dirty="0"/>
+              <a:t> an </a:t>
+            </a:r>
+            <a:r>
+              <a:rPr lang="it-IT" dirty="0" err="1"/>
+              <a:t>order</a:t>
+            </a:r>
+            <a:r>
+              <a:rPr lang="it-IT" dirty="0"/>
+              <a:t> of </a:t>
+            </a:r>
+            <a:r>
+              <a:rPr lang="it-IT" dirty="0" err="1"/>
+              <a:t>magnitude</a:t>
+            </a:r>
+            <a:r>
+              <a:rPr lang="it-IT" dirty="0"/>
+              <a:t>, a 100-megawatt </a:t>
+            </a:r>
+            <a:r>
+              <a:rPr lang="it-IT" dirty="0" err="1"/>
+              <a:t>representative</a:t>
+            </a:r>
+            <a:r>
+              <a:rPr lang="it-IT" dirty="0"/>
+              <a:t> farm </a:t>
+            </a:r>
+            <a:r>
+              <a:rPr lang="it-IT" dirty="0" err="1"/>
+              <a:t>earns</a:t>
             </a:r>
             <a:r>
               <a:rPr lang="it-IT" dirty="0"/>
               <a:t> </a:t>
-            </a:r>
-            <a:r>
-              <a:rPr lang="it-IT" dirty="0" err="1"/>
-              <a:t>cuts</a:t>
-            </a:r>
-            <a:r>
-              <a:rPr lang="it-IT" dirty="0"/>
-              <a:t> the </a:t>
-            </a:r>
-            <a:r>
-              <a:rPr lang="it-IT" dirty="0" err="1"/>
-              <a:t>upside</a:t>
-            </a:r>
-            <a:r>
-              <a:rPr lang="it-IT" dirty="0"/>
-              <a:t> </a:t>
-            </a:r>
-            <a:r>
-              <a:rPr lang="it-IT" dirty="0" err="1"/>
-              <a:t>without</a:t>
-            </a:r>
-            <a:r>
-              <a:rPr lang="it-IT" dirty="0"/>
-              <a:t> a </a:t>
-            </a:r>
-            <a:r>
-              <a:rPr lang="it-IT" dirty="0" err="1"/>
-              <a:t>floor</a:t>
-            </a:r>
-            <a:r>
-              <a:rPr lang="it-IT" dirty="0"/>
-              <a:t> under a </a:t>
-            </a:r>
-            <a:r>
-              <a:rPr lang="it-IT" dirty="0" err="1"/>
-              <a:t>prolonged</a:t>
-            </a:r>
-            <a:r>
-              <a:rPr lang="it-IT" dirty="0"/>
-              <a:t> </a:t>
-            </a:r>
-            <a:r>
-              <a:rPr lang="it-IT" dirty="0" err="1"/>
-              <a:t>calm</a:t>
-            </a:r>
-            <a:r>
-              <a:rPr lang="it-IT" dirty="0"/>
-              <a:t>. </a:t>
-            </a:r>
-            <a:r>
-              <a:rPr lang="it-IT" dirty="0" err="1"/>
-              <a:t>As</a:t>
-            </a:r>
-            <a:r>
-              <a:rPr lang="it-IT" dirty="0"/>
-              <a:t> an </a:t>
-            </a:r>
-            <a:r>
-              <a:rPr lang="it-IT" dirty="0" err="1"/>
-              <a:t>order</a:t>
-            </a:r>
-            <a:r>
-              <a:rPr lang="it-IT" dirty="0"/>
-              <a:t> of </a:t>
-            </a:r>
-            <a:r>
-              <a:rPr lang="it-IT" dirty="0" err="1"/>
-              <a:t>magnitude</a:t>
-            </a:r>
-            <a:r>
-              <a:rPr lang="it-IT" dirty="0"/>
-              <a:t>, a 100-megawatt farm </a:t>
-            </a:r>
-            <a:r>
-              <a:rPr lang="it-IT" dirty="0" err="1"/>
-              <a:t>at</a:t>
-            </a:r>
-            <a:r>
-              <a:rPr lang="it-IT" dirty="0"/>
-              <a:t> a 25.7 per cent </a:t>
-            </a:r>
-            <a:r>
-              <a:rPr lang="it-IT" dirty="0" err="1"/>
-              <a:t>capacity</a:t>
-            </a:r>
-            <a:r>
-              <a:rPr lang="it-IT" dirty="0"/>
-              <a:t> </a:t>
-            </a:r>
-            <a:r>
-              <a:rPr lang="it-IT" dirty="0" err="1"/>
-              <a:t>factor</a:t>
-            </a:r>
-            <a:r>
-              <a:rPr lang="it-IT" dirty="0"/>
-              <a:t> </a:t>
-            </a:r>
-            <a:r>
-              <a:rPr lang="it-IT" dirty="0" err="1"/>
-              <a:t>generates</a:t>
-            </a:r>
-            <a:r>
-              <a:rPr lang="it-IT" dirty="0"/>
-              <a:t> </a:t>
-            </a:r>
-            <a:r>
-              <a:rPr lang="it-IT" dirty="0" err="1"/>
-              <a:t>about</a:t>
-            </a:r>
-            <a:r>
-              <a:rPr lang="it-IT" dirty="0"/>
-              <a:t> 225,000 megawatt-hours a </a:t>
-            </a:r>
-            <a:r>
-              <a:rPr lang="it-IT" dirty="0" err="1"/>
-              <a:t>year</a:t>
-            </a:r>
-            <a:r>
-              <a:rPr lang="it-IT" dirty="0"/>
-              <a:t>, </a:t>
             </a:r>
             <a:r>
               <a:rPr lang="it-IT" dirty="0" err="1"/>
@@ -4766,6 +5073,13 @@
           </p:nvPr>
         </p:nvSpPr>
         <p:spPr/>
+        <p:txBody>
+          <a:bodyPr/>
+          <a:lstStyle/>
+          <a:p>
+            <a:endParaRPr lang="it-IT"/>
+          </a:p>
+        </p:txBody>
       </p:sp>
       <p:sp>
         <p:nvSpPr>
@@ -4804,7 +5118,7 @@
             </a:r>
             <a:r>
               <a:rPr lang="it-IT" dirty="0" err="1"/>
-              <a:t>reasearch</a:t>
+              <a:t>research</a:t>
             </a:r>
             <a:r>
               <a:rPr lang="it-IT" dirty="0"/>
@@ -4956,7 +5270,7 @@
             </a:r>
             <a:r>
               <a:rPr lang="it-IT" dirty="0" err="1"/>
-              <a:t>prolunged</a:t>
+              <a:t>prolonged</a:t>
             </a:r>
             <a:r>
               <a:rPr lang="it-IT" dirty="0"/>
@@ -5164,7 +5478,7 @@
             </a:r>
             <a:r>
               <a:rPr lang="it-IT" dirty="0"/>
-              <a:t>:</a:t>
+              <a:t>t:</a:t>
             </a:r>
             <a:r>
               <a:rPr dirty="0"/>
@@ -5192,6 +5506,13 @@
           </p:nvPr>
         </p:nvSpPr>
         <p:spPr/>
+        <p:txBody>
+          <a:bodyPr/>
+          <a:lstStyle/>
+          <a:p>
+            <a:endParaRPr lang="it-IT"/>
+          </a:p>
+        </p:txBody>
       </p:sp>
     </p:spTree>
   </p:cSld>
@@ -5229,6 +5550,13 @@
           </p:nvPr>
         </p:nvSpPr>
         <p:spPr/>
+        <p:txBody>
+          <a:bodyPr/>
+          <a:lstStyle/>
+          <a:p>
+            <a:endParaRPr lang="it-IT"/>
+          </a:p>
+        </p:txBody>
       </p:sp>
       <p:sp>
         <p:nvSpPr>
@@ -5296,7 +5624,7 @@
             </a:r>
             <a:r>
               <a:rPr lang="en-US" dirty="0"/>
-              <a:t>. It is where the methodology was build and validated.</a:t>
+              <a:t>. It is where the methodology was built and validated.</a:t>
             </a:r>
           </a:p>
           <a:p>
@@ -5305,7 +5633,15 @@
           <a:p>
             <a:r>
               <a:rPr lang="en-US" dirty="0"/>
-              <a:t>Dataset B is the reference: wind in northern Germany, ten years of daily observation </a:t>
+              <a:t>Dataset B is the reference: wind in northern Germany, specifically </a:t>
+            </a:r>
+            <a:r>
+              <a:rPr lang="en-US" dirty="0" err="1"/>
+              <a:t>Nordfriesland</a:t>
+            </a:r>
+            <a:r>
+              <a:rPr lang="en-US" dirty="0"/>
+              <a:t> that is the densest onshore wind corridor (a big area for wind electricity production), ten years of daily observations </a:t>
             </a:r>
             <a:r>
               <a:rPr lang="en-US" dirty="0" err="1"/>
@@ -5321,15 +5657,7 @@
             </a:r>
             <a:r>
               <a:rPr lang="en-US" dirty="0"/>
-              <a:t>, the height of a turbine. This is the area that I chose since </a:t>
-            </a:r>
-            <a:r>
-              <a:rPr lang="en-US" dirty="0" err="1"/>
-              <a:t>Nordfriesland</a:t>
-            </a:r>
-            <a:r>
-              <a:rPr lang="en-US" dirty="0"/>
-              <a:t> is the densest onshore wind corridor, a big area for wind electricity production.</a:t>
+              <a:t>, the height of a turbine and a significantly higher mean.</a:t>
             </a:r>
           </a:p>
           <a:p>
@@ -5342,15 +5670,7 @@
             </a:r>
             <a:r>
               <a:rPr lang="it-IT" dirty="0"/>
-              <a:t> the </a:t>
-            </a:r>
-            <a:r>
-              <a:rPr lang="it-IT" dirty="0" err="1"/>
-              <a:t>functional</a:t>
-            </a:r>
-            <a:r>
-              <a:rPr lang="it-IT" dirty="0"/>
-              <a:t> form </a:t>
+              <a:t> the pipeline </a:t>
             </a:r>
             <a:r>
               <a:rPr lang="it-IT" dirty="0" err="1"/>
@@ -5536,6 +5856,13 @@
           </p:nvPr>
         </p:nvSpPr>
         <p:spPr/>
+        <p:txBody>
+          <a:bodyPr/>
+          <a:lstStyle/>
+          <a:p>
+            <a:endParaRPr lang="it-IT"/>
+          </a:p>
+        </p:txBody>
       </p:sp>
       <p:sp>
         <p:nvSpPr>
@@ -5748,7 +6075,7 @@
           <a:p>
             <a:r>
               <a:rPr lang="it-IT" dirty="0"/>
-              <a:t>Second an AR(4) models the </a:t>
+              <a:t>Second, an AR(4) models the </a:t>
             </a:r>
             <a:r>
               <a:rPr lang="it-IT" dirty="0" err="1"/>
@@ -5858,7 +6185,7 @@
             </a:r>
             <a:r>
               <a:rPr lang="it-IT" dirty="0" err="1"/>
-              <a:t>represent</a:t>
+              <a:t>represents</a:t>
             </a:r>
             <a:r>
               <a:rPr lang="it-IT" dirty="0"/>
@@ -6117,7 +6444,7 @@
             </a:r>
             <a:r>
               <a:rPr lang="it-IT" dirty="0"/>
-              <a:t> h, following the benchmark θ = 0, </a:t>
+              <a:t> h and following the benchmark θ = 0, </a:t>
             </a:r>
             <a:r>
               <a:rPr lang="it-IT" dirty="0" err="1"/>
@@ -6142,6 +6469,13 @@
           </p:nvPr>
         </p:nvSpPr>
         <p:spPr/>
+        <p:txBody>
+          <a:bodyPr/>
+          <a:lstStyle/>
+          <a:p>
+            <a:endParaRPr lang="it-IT"/>
+          </a:p>
+        </p:txBody>
       </p:sp>
     </p:spTree>
   </p:cSld>
@@ -6179,6 +6513,13 @@
           </p:nvPr>
         </p:nvSpPr>
         <p:spPr/>
+        <p:txBody>
+          <a:bodyPr/>
+          <a:lstStyle/>
+          <a:p>
+            <a:endParaRPr lang="it-IT"/>
+          </a:p>
+        </p:txBody>
       </p:sp>
       <p:sp>
         <p:nvSpPr>
@@ -6197,16 +6538,23 @@
           <a:p>
             <a:r>
               <a:rPr dirty="0"/>
-              <a:t>Question one: price.</a:t>
-            </a:r>
-          </a:p>
-          <a:p>
-            <a:endParaRPr dirty="0"/>
-          </a:p>
-          <a:p>
+              <a:t>The contract</a:t>
+            </a:r>
+            <a:r>
+              <a:rPr lang="it-IT" dirty="0"/>
+              <a:t> </a:t>
+            </a:r>
+            <a:r>
+              <a:rPr lang="it-IT" dirty="0" err="1"/>
+              <a:t>we</a:t>
+            </a:r>
+            <a:r>
+              <a:rPr lang="it-IT" dirty="0"/>
+              <a:t> are pricing</a:t>
+            </a:r>
             <a:r>
               <a:rPr dirty="0"/>
-              <a:t>The contract is a variance swap on German wind generation. It pays the </a:t>
+              <a:t> is a variance swap on German wind generation. It pays the </a:t>
             </a:r>
             <a:r>
               <a:rPr dirty="0" err="1"/>
@@ -6214,28 +6562,129 @@
             </a:r>
             <a:r>
               <a:rPr dirty="0"/>
-              <a:t> variability of wind output, minus a fixed strike. The producer sells it: it receives a fixed amount</a:t>
-            </a:r>
-            <a:r>
-              <a:rPr lang="it-IT" dirty="0"/>
-              <a:t> in case of low </a:t>
-            </a:r>
-            <a:r>
-              <a:rPr lang="it-IT" dirty="0" err="1"/>
-              <a:t>variability</a:t>
-            </a:r>
-            <a:r>
-              <a:rPr dirty="0"/>
-              <a:t>, and pays when </a:t>
-            </a:r>
-            <a:r>
-              <a:rPr lang="it-IT" dirty="0"/>
-              <a:t>wind</a:t>
-            </a:r>
-            <a:r>
-              <a:rPr dirty="0"/>
-              <a:t> is unstable.</a:t>
-            </a:r>
+              <a:t> variability of wind output, minus a fixed strike. The producer sells it: </a:t>
+            </a:r>
+            <a:r>
+              <a:rPr lang="it-IT" dirty="0" err="1"/>
+              <a:t>it</a:t>
+            </a:r>
+            <a:r>
+              <a:rPr lang="it-IT" dirty="0"/>
+              <a:t> </a:t>
+            </a:r>
+            <a:r>
+              <a:rPr lang="it-IT" dirty="0" err="1"/>
+              <a:t>receives</a:t>
+            </a:r>
+            <a:r>
+              <a:rPr lang="it-IT" dirty="0"/>
+              <a:t> the </a:t>
+            </a:r>
+            <a:r>
+              <a:rPr lang="it-IT" dirty="0" err="1"/>
+              <a:t>fixed</a:t>
+            </a:r>
+            <a:r>
+              <a:rPr lang="it-IT" dirty="0"/>
+              <a:t> strike and </a:t>
+            </a:r>
+            <a:r>
+              <a:rPr lang="it-IT" dirty="0" err="1"/>
+              <a:t>pays</a:t>
+            </a:r>
+            <a:r>
+              <a:rPr lang="it-IT" dirty="0"/>
+              <a:t> the </a:t>
+            </a:r>
+            <a:r>
+              <a:rPr lang="it-IT" dirty="0" err="1"/>
+              <a:t>realised</a:t>
+            </a:r>
+            <a:r>
+              <a:rPr lang="it-IT" dirty="0"/>
+              <a:t> </a:t>
+            </a:r>
+            <a:r>
+              <a:rPr lang="it-IT" dirty="0" err="1"/>
+              <a:t>variance</a:t>
+            </a:r>
+            <a:r>
+              <a:rPr lang="it-IT" dirty="0"/>
+              <a:t>, so </a:t>
+            </a:r>
+            <a:r>
+              <a:rPr lang="it-IT" dirty="0" err="1"/>
+              <a:t>it</a:t>
+            </a:r>
+            <a:r>
+              <a:rPr lang="it-IT" dirty="0"/>
+              <a:t> gains </a:t>
+            </a:r>
+            <a:r>
+              <a:rPr lang="it-IT" dirty="0" err="1"/>
+              <a:t>when</a:t>
+            </a:r>
+            <a:r>
+              <a:rPr lang="it-IT" dirty="0"/>
+              <a:t> output </a:t>
+            </a:r>
+            <a:r>
+              <a:rPr lang="it-IT" dirty="0" err="1"/>
+              <a:t>is</a:t>
+            </a:r>
+            <a:r>
+              <a:rPr lang="it-IT" dirty="0"/>
+              <a:t> </a:t>
+            </a:r>
+            <a:r>
+              <a:rPr lang="it-IT" dirty="0" err="1"/>
+              <a:t>stable</a:t>
+            </a:r>
+            <a:r>
+              <a:rPr lang="it-IT" dirty="0"/>
+              <a:t> and </a:t>
+            </a:r>
+            <a:r>
+              <a:rPr lang="it-IT" dirty="0" err="1"/>
+              <a:t>loses</a:t>
+            </a:r>
+            <a:r>
+              <a:rPr lang="it-IT" dirty="0"/>
+              <a:t> </a:t>
+            </a:r>
+            <a:r>
+              <a:rPr lang="it-IT" dirty="0" err="1"/>
+              <a:t>when</a:t>
+            </a:r>
+            <a:r>
+              <a:rPr lang="it-IT" dirty="0"/>
+              <a:t> </a:t>
+            </a:r>
+            <a:r>
+              <a:rPr lang="it-IT" dirty="0" err="1"/>
+              <a:t>it</a:t>
+            </a:r>
+            <a:r>
+              <a:rPr lang="it-IT" dirty="0"/>
+              <a:t> </a:t>
+            </a:r>
+            <a:r>
+              <a:rPr lang="it-IT" dirty="0" err="1"/>
+              <a:t>is</a:t>
+            </a:r>
+            <a:r>
+              <a:rPr lang="it-IT" dirty="0"/>
+              <a:t> </a:t>
+            </a:r>
+            <a:r>
+              <a:rPr lang="it-IT" dirty="0" err="1"/>
+              <a:t>unstable</a:t>
+            </a:r>
+            <a:r>
+              <a:rPr lang="it-IT" dirty="0"/>
+              <a:t>.</a:t>
+            </a:r>
+            <a:endParaRPr dirty="0"/>
           </a:p>
           <a:p>
             <a:endParaRPr dirty="0"/>
@@ -6289,7 +6738,75 @@
             </a:r>
             <a:r>
               <a:rPr dirty="0"/>
-              <a:t> once its number is converted into the same units. So the two are in the same range. The model is higher, and we expect that: I model one location, while German output comes from thousands of turbines across the country. Averaging over many places makes output smoother.</a:t>
+              <a:t> once its number is converted into the same units. </a:t>
+            </a:r>
+            <a:r>
+              <a:rPr lang="it-IT" dirty="0"/>
+              <a:t>So </a:t>
+            </a:r>
+            <a:r>
+              <a:rPr lang="it-IT" dirty="0" err="1"/>
+              <a:t>it</a:t>
+            </a:r>
+            <a:r>
+              <a:rPr lang="it-IT" dirty="0"/>
+              <a:t> </a:t>
+            </a:r>
+            <a:r>
+              <a:rPr lang="it-IT" dirty="0" err="1"/>
+              <a:t>has</a:t>
+            </a:r>
+            <a:r>
+              <a:rPr lang="it-IT" dirty="0"/>
+              <a:t> the </a:t>
+            </a:r>
+            <a:r>
+              <a:rPr lang="it-IT" dirty="0" err="1"/>
+              <a:t>same</a:t>
+            </a:r>
+            <a:r>
+              <a:rPr lang="it-IT" dirty="0"/>
+              <a:t> </a:t>
+            </a:r>
+            <a:r>
+              <a:rPr lang="it-IT" dirty="0" err="1"/>
+              <a:t>order</a:t>
+            </a:r>
+            <a:r>
+              <a:rPr lang="it-IT" dirty="0"/>
+              <a:t> of </a:t>
+            </a:r>
+            <a:r>
+              <a:rPr lang="it-IT" dirty="0" err="1"/>
+              <a:t>magnitude</a:t>
+            </a:r>
+            <a:r>
+              <a:rPr lang="it-IT" dirty="0"/>
+              <a:t> </a:t>
+            </a:r>
+            <a:r>
+              <a:rPr lang="it-IT" dirty="0" err="1"/>
+              <a:t>as</a:t>
+            </a:r>
+            <a:r>
+              <a:rPr lang="it-IT" dirty="0"/>
+              <a:t> the market</a:t>
+            </a:r>
+            <a:r>
+              <a:rPr dirty="0"/>
+              <a:t>. The model is higher, and we expect that: I model one location, while German output comes from thousands of turbines across the country</a:t>
+            </a:r>
+            <a:r>
+              <a:rPr lang="it-IT" dirty="0"/>
+              <a:t> and a</a:t>
+            </a:r>
+            <a:r>
+              <a:rPr dirty="0" err="1"/>
+              <a:t>veraging</a:t>
+            </a:r>
+            <a:r>
+              <a:rPr dirty="0"/>
+              <a:t> over many places makes output smoother.</a:t>
             </a:r>
           </a:p>
           <a:p>
@@ -6314,6 +6831,13 @@
           </p:nvPr>
         </p:nvSpPr>
         <p:spPr/>
+        <p:txBody>
+          <a:bodyPr/>
+          <a:lstStyle/>
+          <a:p>
+            <a:endParaRPr lang="it-IT"/>
+          </a:p>
+        </p:txBody>
       </p:sp>
     </p:spTree>
   </p:cSld>
@@ -6351,6 +6875,13 @@
           </p:nvPr>
         </p:nvSpPr>
         <p:spPr/>
+        <p:txBody>
+          <a:bodyPr/>
+          <a:lstStyle/>
+          <a:p>
+            <a:endParaRPr lang="it-IT"/>
+          </a:p>
+        </p:txBody>
       </p:sp>
       <p:sp>
         <p:nvSpPr>
@@ -6369,15 +6900,6 @@
           <a:p>
             <a:r>
               <a:rPr dirty="0"/>
-              <a:t>Question two: hedge.</a:t>
-            </a:r>
-          </a:p>
-          <a:p>
-            <a:endParaRPr dirty="0"/>
-          </a:p>
-          <a:p>
-            <a:r>
-              <a:rPr dirty="0"/>
               <a:t>A variance swap has a blind spot. It measures how much the wind changes, not whether there is enough of it</a:t>
             </a:r>
             <a:r>
@@ -6412,47 +6934,47 @@
             </a:r>
             <a:r>
               <a:rPr lang="it-IT" dirty="0"/>
-              <a:t> introduce CAWS, in </a:t>
-            </a:r>
-            <a:r>
-              <a:rPr lang="it-IT" dirty="0" err="1"/>
-              <a:t>normalised</a:t>
-            </a:r>
-            <a:r>
-              <a:rPr lang="it-IT" dirty="0"/>
-              <a:t> </a:t>
-            </a:r>
-            <a:r>
-              <a:rPr lang="it-IT" dirty="0" err="1"/>
-              <a:t>rolling-annual-mean</a:t>
-            </a:r>
-            <a:r>
-              <a:rPr lang="it-IT" dirty="0"/>
-              <a:t> form, </a:t>
-            </a:r>
-            <a:r>
-              <a:rPr lang="it-IT" dirty="0" err="1"/>
-              <a:t>struck</a:t>
-            </a:r>
-            <a:r>
-              <a:rPr lang="it-IT" dirty="0"/>
-              <a:t> </a:t>
-            </a:r>
-            <a:r>
-              <a:rPr lang="it-IT" dirty="0" err="1"/>
-              <a:t>at</a:t>
-            </a:r>
-            <a:r>
-              <a:rPr lang="it-IT" dirty="0"/>
-              <a:t> the full-sample </a:t>
-            </a:r>
-            <a:r>
-              <a:rPr lang="it-IT" dirty="0" err="1"/>
-              <a:t>mean</a:t>
-            </a:r>
-            <a:r>
-              <a:rPr lang="it-IT" dirty="0"/>
-              <a:t>. The payoff </a:t>
+              <a:t> introduce CAWS, </a:t>
+            </a:r>
+            <a:r>
+              <a:rPr lang="it-IT" dirty="0" err="1"/>
+              <a:t>written</a:t>
+            </a:r>
+            <a:r>
+              <a:rPr lang="it-IT" dirty="0"/>
+              <a:t> on the average wind speed of the </a:t>
+            </a:r>
+            <a:r>
+              <a:rPr lang="it-IT" dirty="0" err="1"/>
+              <a:t>year</a:t>
+            </a:r>
+            <a:r>
+              <a:rPr lang="it-IT" dirty="0"/>
+              <a:t>, and </a:t>
+            </a:r>
+            <a:r>
+              <a:rPr lang="it-IT" dirty="0" err="1"/>
+              <a:t>its</a:t>
+            </a:r>
+            <a:r>
+              <a:rPr lang="it-IT" dirty="0"/>
+              <a:t> strike </a:t>
+            </a:r>
+            <a:r>
+              <a:rPr lang="it-IT" dirty="0" err="1"/>
+              <a:t>is</a:t>
+            </a:r>
+            <a:r>
+              <a:rPr lang="it-IT" dirty="0"/>
+              <a:t> the long-</a:t>
+            </a:r>
+            <a:r>
+              <a:rPr lang="it-IT" dirty="0" err="1"/>
+              <a:t>run</a:t>
+            </a:r>
+            <a:r>
+              <a:rPr lang="it-IT" dirty="0"/>
+              <a:t> average. The payoff </a:t>
             </a:r>
             <a:r>
               <a:rPr lang="it-IT" dirty="0" err="1"/>
@@ -6551,6 +7073,14 @@
             </a:r>
             <a:r>
               <a:rPr lang="it-IT" dirty="0" err="1"/>
+              <a:t>it</a:t>
+            </a:r>
+            <a:r>
+              <a:rPr lang="it-IT" dirty="0"/>
+              <a:t> </a:t>
+            </a:r>
+            <a:r>
+              <a:rPr lang="it-IT" dirty="0" err="1"/>
               <a:t>is</a:t>
             </a:r>
             <a:r>
@@ -6627,7 +7157,7 @@
             </a:r>
             <a:r>
               <a:rPr lang="en-US" dirty="0"/>
-              <a:t> 100-megawatt farm, that deficit means roughly 14 per cent less generation: about 32,000 megawatt-hours, or some 2.3 million euros of gross revenue.</a:t>
+              <a:t> 100-megawatt farm, that deficit means roughly 14 per cent less generation: about 32,000 megawatt-hours, or some 2.3 million euros of gross revenue at risk.</a:t>
             </a:r>
             <a:endParaRPr lang="it-IT" dirty="0"/>
           </a:p>
@@ -6649,28 +7179,17 @@
             </a:r>
             <a:r>
               <a:rPr lang="it-IT" dirty="0"/>
-              <a:t> and covers the </a:t>
-            </a:r>
-            <a:r>
-              <a:rPr lang="it-IT" dirty="0" err="1"/>
-              <a:t>other</a:t>
-            </a:r>
-            <a:r>
-              <a:rPr lang="it-IT" dirty="0"/>
-              <a:t> </a:t>
-            </a:r>
-            <a:r>
-              <a:rPr lang="it-IT" dirty="0" err="1"/>
-              <a:t>leg</a:t>
-            </a:r>
-            <a:r>
-              <a:rPr lang="it-IT" dirty="0"/>
-              <a:t> of risk</a:t>
-            </a:r>
-            <a:r>
-              <a:rPr dirty="0"/>
-              <a:t>.</a:t>
-            </a:r>
+              <a:t> and covers the blind spot of the </a:t>
+            </a:r>
+            <a:r>
+              <a:rPr lang="it-IT" dirty="0" err="1"/>
+              <a:t>variance</a:t>
+            </a:r>
+            <a:r>
+              <a:rPr lang="it-IT" dirty="0"/>
+              <a:t> swap.</a:t>
+            </a:r>
+            <a:endParaRPr dirty="0"/>
           </a:p>
         </p:txBody>
       </p:sp>
@@ -6685,6 +7204,13 @@
           </p:nvPr>
         </p:nvSpPr>
         <p:spPr/>
+        <p:txBody>
+          <a:bodyPr/>
+          <a:lstStyle/>
+          <a:p>
+            <a:endParaRPr lang="it-IT"/>
+          </a:p>
+        </p:txBody>
       </p:sp>
     </p:spTree>
   </p:cSld>
@@ -6722,6 +7248,13 @@
           </p:nvPr>
         </p:nvSpPr>
         <p:spPr/>
+        <p:txBody>
+          <a:bodyPr/>
+          <a:lstStyle/>
+          <a:p>
+            <a:endParaRPr lang="it-IT"/>
+          </a:p>
+        </p:txBody>
       </p:sp>
       <p:sp>
         <p:nvSpPr>
@@ -6740,28 +7273,6 @@
           <a:p>
             <a:r>
               <a:rPr dirty="0"/>
-              <a:t>Question three: </a:t>
-            </a:r>
-            <a:r>
-              <a:rPr lang="it-IT" dirty="0" err="1"/>
-              <a:t>value</a:t>
-            </a:r>
-            <a:r>
-              <a:rPr lang="it-IT" dirty="0"/>
-              <a:t> of information</a:t>
-            </a:r>
-            <a:r>
-              <a:rPr dirty="0"/>
-              <a:t>. </a:t>
-            </a:r>
-            <a:endParaRPr lang="it-IT" dirty="0"/>
-          </a:p>
-          <a:p>
-            <a:endParaRPr dirty="0"/>
-          </a:p>
-          <a:p>
-            <a:r>
-              <a:rPr dirty="0"/>
               <a:t>I run the same model on the Bologna data instead of the German data. The price comes out 94 per cent too low. Same model, same assumptions; only the data changed.</a:t>
             </a:r>
           </a:p>
@@ -6828,6 +7339,13 @@
           </p:nvPr>
         </p:nvSpPr>
         <p:spPr/>
+        <p:txBody>
+          <a:bodyPr/>
+          <a:lstStyle/>
+          <a:p>
+            <a:endParaRPr lang="it-IT"/>
+          </a:p>
+        </p:txBody>
       </p:sp>
     </p:spTree>
   </p:cSld>
@@ -6865,6 +7383,13 @@
           </p:nvPr>
         </p:nvSpPr>
         <p:spPr/>
+        <p:txBody>
+          <a:bodyPr/>
+          <a:lstStyle/>
+          <a:p>
+            <a:endParaRPr lang="it-IT"/>
+          </a:p>
+        </p:txBody>
       </p:sp>
       <p:sp>
         <p:nvSpPr>
@@ -6901,7 +7426,7 @@
           <a:p>
             <a:r>
               <a:rPr dirty="0"/>
-              <a:t>So the Bologna data is not just a little wrong. It has no link with the cash flow we want to hedge.</a:t>
+              <a:t>So the Bologna data has no link with the cash flow we want to hedge.</a:t>
             </a:r>
           </a:p>
           <a:p>
@@ -6909,26 +7434,164 @@
           </a:p>
           <a:p>
             <a:r>
-              <a:rPr dirty="0"/>
-              <a:t>And here is the </a:t>
-            </a:r>
-            <a:r>
-              <a:rPr lang="it-IT" dirty="0"/>
-              <a:t>DANGER</a:t>
-            </a:r>
-            <a:r>
-              <a:rPr dirty="0"/>
-              <a:t>. Converted into market units, the Bologna price looks reasonable. A quick check on the level would accept it. A wrong number that looks plausible is worse than one that is obviously wrong.</a:t>
-            </a:r>
-          </a:p>
-          <a:p>
+              <a:rPr lang="it-IT" dirty="0"/>
+              <a:t>Here </a:t>
+            </a:r>
+            <a:r>
+              <a:rPr lang="it-IT" dirty="0" err="1"/>
+              <a:t>is</a:t>
+            </a:r>
+            <a:r>
+              <a:rPr lang="it-IT" dirty="0"/>
+              <a:t> the </a:t>
+            </a:r>
+            <a:r>
+              <a:rPr lang="it-IT" dirty="0" err="1"/>
+              <a:t>danger</a:t>
+            </a:r>
+            <a:r>
+              <a:rPr lang="it-IT" dirty="0"/>
+              <a:t>: </a:t>
+            </a:r>
+            <a:r>
+              <a:rPr lang="it-IT" dirty="0" err="1"/>
+              <a:t>converted</a:t>
+            </a:r>
+            <a:r>
+              <a:rPr lang="it-IT" dirty="0"/>
+              <a:t> </a:t>
+            </a:r>
+            <a:r>
+              <a:rPr lang="it-IT" dirty="0" err="1"/>
+              <a:t>into</a:t>
+            </a:r>
+            <a:r>
+              <a:rPr lang="it-IT" dirty="0"/>
+              <a:t> market </a:t>
+            </a:r>
+            <a:r>
+              <a:rPr lang="it-IT" dirty="0" err="1"/>
+              <a:t>units</a:t>
+            </a:r>
+            <a:r>
+              <a:rPr lang="it-IT" dirty="0"/>
+              <a:t>, the Bologna price looks </a:t>
+            </a:r>
+            <a:r>
+              <a:rPr lang="it-IT" dirty="0" err="1"/>
+              <a:t>reasonable</a:t>
+            </a:r>
+            <a:r>
+              <a:rPr lang="it-IT" dirty="0"/>
+              <a:t>, </a:t>
+            </a:r>
+            <a:r>
+              <a:rPr lang="it-IT" dirty="0" err="1"/>
+              <a:t>but</a:t>
+            </a:r>
+            <a:r>
+              <a:rPr lang="it-IT" dirty="0"/>
+              <a:t> </a:t>
+            </a:r>
+            <a:r>
+              <a:rPr lang="it-IT" dirty="0" err="1"/>
+              <a:t>this</a:t>
+            </a:r>
+            <a:r>
+              <a:rPr lang="it-IT" dirty="0"/>
+              <a:t> </a:t>
+            </a:r>
+            <a:r>
+              <a:rPr lang="it-IT" dirty="0" err="1"/>
+              <a:t>simple</a:t>
+            </a:r>
+            <a:r>
+              <a:rPr lang="it-IT" dirty="0"/>
+              <a:t> </a:t>
+            </a:r>
+            <a:r>
+              <a:rPr lang="it-IT" dirty="0" err="1"/>
+              <a:t>regression</a:t>
+            </a:r>
+            <a:r>
+              <a:rPr lang="it-IT" dirty="0"/>
+              <a:t> shows </a:t>
+            </a:r>
+            <a:r>
+              <a:rPr lang="it-IT" dirty="0" err="1"/>
+              <a:t>it</a:t>
+            </a:r>
+            <a:r>
+              <a:rPr lang="it-IT" dirty="0"/>
+              <a:t> </a:t>
+            </a:r>
+            <a:r>
+              <a:rPr lang="it-IT" dirty="0" err="1"/>
+              <a:t>carries</a:t>
+            </a:r>
+            <a:r>
+              <a:rPr lang="it-IT" dirty="0"/>
+              <a:t> no information.</a:t>
+            </a:r>
+          </a:p>
+          <a:p>
+            <a:r>
+              <a:rPr lang="it-IT" dirty="0" err="1"/>
+              <a:t>That</a:t>
+            </a:r>
+            <a:r>
+              <a:rPr lang="it-IT" dirty="0"/>
+              <a:t> </a:t>
+            </a:r>
+            <a:r>
+              <a:rPr lang="it-IT" dirty="0" err="1"/>
+              <a:t>is</a:t>
+            </a:r>
+            <a:r>
+              <a:rPr lang="it-IT" dirty="0"/>
+              <a:t> </a:t>
+            </a:r>
+            <a:r>
+              <a:rPr lang="it-IT" dirty="0" err="1"/>
+              <a:t>why</a:t>
+            </a:r>
+            <a:r>
+              <a:rPr lang="it-IT" dirty="0"/>
+              <a:t> </a:t>
+            </a:r>
+            <a:r>
+              <a:rPr lang="it-IT" dirty="0" err="1"/>
+              <a:t>this</a:t>
+            </a:r>
+            <a:r>
+              <a:rPr lang="it-IT" dirty="0"/>
+              <a:t> test </a:t>
+            </a:r>
+            <a:r>
+              <a:rPr lang="it-IT" dirty="0" err="1"/>
+              <a:t>should</a:t>
+            </a:r>
+            <a:r>
+              <a:rPr lang="it-IT" dirty="0"/>
+              <a:t> come </a:t>
+            </a:r>
+            <a:r>
+              <a:rPr lang="it-IT" dirty="0" err="1"/>
+              <a:t>before</a:t>
+            </a:r>
+            <a:r>
+              <a:rPr lang="it-IT" dirty="0"/>
+              <a:t> </a:t>
+            </a:r>
+            <a:r>
+              <a:rPr lang="it-IT" dirty="0" err="1"/>
+              <a:t>any</a:t>
+            </a:r>
+            <a:r>
+              <a:rPr lang="it-IT" dirty="0"/>
+              <a:t> pricing.</a:t>
+            </a:r>
             <a:endParaRPr dirty="0"/>
-          </a:p>
-          <a:p>
-            <a:r>
-              <a:rPr dirty="0"/>
-              <a:t>The good news: this test takes one regression. </a:t>
-            </a:r>
           </a:p>
         </p:txBody>
       </p:sp>
@@ -6943,6 +7606,13 @@
           </p:nvPr>
         </p:nvSpPr>
         <p:spPr/>
+        <p:txBody>
+          <a:bodyPr/>
+          <a:lstStyle/>
+          <a:p>
+            <a:endParaRPr lang="it-IT"/>
+          </a:p>
+        </p:txBody>
       </p:sp>
     </p:spTree>
   </p:cSld>
@@ -23084,8 +23754,8 @@
         </p:nvSpPr>
         <p:spPr>
           <a:xfrm>
-            <a:off x="868680" y="3650349"/>
-            <a:ext cx="1737360" cy="553998"/>
+            <a:off x="868679" y="3650349"/>
+            <a:ext cx="4663439" cy="553998"/>
           </a:xfrm>
           <a:prstGeom prst="rect">
             <a:avLst/>
@@ -23098,9 +23768,6 @@
           </a:bodyPr>
           <a:lstStyle/>
           <a:p>
-            <a:pPr marL="0" indent="0" algn="l">
-              <a:buNone/>
-            </a:pPr>
             <a:r>
               <a:rPr lang="en-US" sz="3600" b="1" dirty="0">
                 <a:solidFill>
@@ -23110,7 +23777,18 @@
                 <a:ea typeface="Cambria"/>
                 <a:cs typeface="Cambria"/>
               </a:rPr>
-              <a:t>C₀</a:t>
+              <a:t>C₀ </a:t>
+            </a:r>
+            <a:r>
+              <a:rPr lang="en-US" sz="2000" b="1" dirty="0">
+                <a:solidFill>
+                  <a:srgbClr val="21295C"/>
+                </a:solidFill>
+                <a:latin typeface="Cambria"/>
+                <a:ea typeface="Cambria"/>
+                <a:cs typeface="Cambria"/>
+              </a:rPr>
+              <a:t>—  seasonal variance level</a:t>
             </a:r>
           </a:p>
         </p:txBody>
@@ -23279,8 +23957,8 @@
         </p:nvSpPr>
         <p:spPr>
           <a:xfrm>
-            <a:off x="6629400" y="3650349"/>
-            <a:ext cx="1737360" cy="553998"/>
+            <a:off x="6629399" y="3650349"/>
+            <a:ext cx="4663439" cy="553998"/>
           </a:xfrm>
           <a:prstGeom prst="rect">
             <a:avLst/>
@@ -23305,7 +23983,18 @@
                 <a:ea typeface="Cambria"/>
                 <a:cs typeface="Cambria"/>
               </a:rPr>
-              <a:t>h(t₀)</a:t>
+              <a:t>h(t₀) </a:t>
+            </a:r>
+            <a:r>
+              <a:rPr lang="en-US" sz="2000" b="1" dirty="0">
+                <a:solidFill>
+                  <a:srgbClr val="21295C"/>
+                </a:solidFill>
+                <a:latin typeface="Cambria"/>
+                <a:ea typeface="Cambria"/>
+                <a:cs typeface="Cambria"/>
+              </a:rPr>
+              <a:t>— current volatility state</a:t>
             </a:r>
           </a:p>
         </p:txBody>
@@ -24620,8 +25309,23 @@
                 </a:solidFill>
                 <a:latin typeface="Calibri"/>
               </a:rPr>
-              <a:t>Written on the average wind speed of the year.</a:t>
-            </a:r>
+              <a:t>Written on the average wind speed of the year</a:t>
+            </a:r>
+            <a:r>
+              <a:rPr lang="it-IT" sz="1600" b="0" i="0" dirty="0">
+                <a:solidFill>
+                  <a:srgbClr val="1C1C1C"/>
+                </a:solidFill>
+                <a:latin typeface="Calibri"/>
+              </a:rPr>
+              <a:t> with strike long-run average.</a:t>
+            </a:r>
+            <a:endParaRPr sz="1600" b="0" i="0" dirty="0">
+              <a:solidFill>
+                <a:srgbClr val="1C1C1C"/>
+              </a:solidFill>
+              <a:latin typeface="Calibri"/>
+            </a:endParaRPr>
           </a:p>
           <a:p>
             <a:pPr algn="l">
@@ -25265,7 +25969,7 @@
                 </a:solidFill>
                 <a:latin typeface="Calibri"/>
               </a:rPr>
-              <a:t>Correcting Bologna’s wind from 10 m to 100 m still leaves the price 88% too low — for any realistic terrain (backup B5).</a:t>
+              <a:t>Correcting Bologna’s wind from 10 m to 100 m still leaves the price 88% too low — for any realistic terrain.</a:t>
             </a:r>
           </a:p>
         </p:txBody>
